--- a/Training Materials/16. React with Redux/Slides/6. Advanced Concepts & Best Practices/advanced-concepts-&-best-practices-slides.pptx
+++ b/Training Materials/16. React with Redux/Slides/6. Advanced Concepts & Best Practices/advanced-concepts-&-best-practices-slides.pptx
@@ -5,18 +5,21 @@
     <p:sldMasterId id="2147483648" r:id="rId1"/>
   </p:sldMasterIdLst>
   <p:notesMasterIdLst>
-    <p:notesMasterId r:id="rId4"/>
+    <p:notesMasterId r:id="rId14"/>
   </p:notesMasterIdLst>
   <p:sldIdLst>
-    <p:sldId id="256" r:id="rId3"/>
-    <p:sldId id="260" r:id="rId5"/>
-    <p:sldId id="264" r:id="rId6"/>
-    <p:sldId id="263" r:id="rId7"/>
-    <p:sldId id="272" r:id="rId8"/>
-    <p:sldId id="273" r:id="rId9"/>
-    <p:sldId id="274" r:id="rId10"/>
-    <p:sldId id="271" r:id="rId11"/>
-    <p:sldId id="268" r:id="rId12"/>
+    <p:sldId id="256" r:id="rId2"/>
+    <p:sldId id="260" r:id="rId3"/>
+    <p:sldId id="275" r:id="rId4"/>
+    <p:sldId id="276" r:id="rId5"/>
+    <p:sldId id="277" r:id="rId6"/>
+    <p:sldId id="264" r:id="rId7"/>
+    <p:sldId id="263" r:id="rId8"/>
+    <p:sldId id="272" r:id="rId9"/>
+    <p:sldId id="273" r:id="rId10"/>
+    <p:sldId id="274" r:id="rId11"/>
+    <p:sldId id="271" r:id="rId12"/>
+    <p:sldId id="268" r:id="rId13"/>
   </p:sldIdLst>
   <p:sldSz cx="18288000" cy="10287000"/>
   <p:notesSz cx="18288000" cy="10287000"/>
@@ -126,6 +129,7 @@
           <a:p>
             <a:fld id="{BC39AE41-6E72-4A24-A266-1879CE137EAD}" type="datetimeFigureOut">
               <a:rPr lang="en-IN" smtClean="0"/>
+              <a:t>22-11-2025</a:t>
             </a:fld>
             <a:endParaRPr lang="en-IN"/>
           </a:p>
@@ -192,7 +196,6 @@
               <a:rPr lang="en-US"/>
               <a:t>Click to edit Master text styles</a:t>
             </a:r>
-            <a:endParaRPr lang="en-US"/>
           </a:p>
           <a:p>
             <a:pPr lvl="1"/>
@@ -200,7 +203,6 @@
               <a:rPr lang="en-US"/>
               <a:t>Second level</a:t>
             </a:r>
-            <a:endParaRPr lang="en-US"/>
           </a:p>
           <a:p>
             <a:pPr lvl="2"/>
@@ -208,7 +210,6 @@
               <a:rPr lang="en-US"/>
               <a:t>Third level</a:t>
             </a:r>
-            <a:endParaRPr lang="en-US"/>
           </a:p>
           <a:p>
             <a:pPr lvl="3"/>
@@ -216,7 +217,6 @@
               <a:rPr lang="en-US"/>
               <a:t>Fourth level</a:t>
             </a:r>
-            <a:endParaRPr lang="en-US"/>
           </a:p>
           <a:p>
             <a:pPr lvl="4"/>
@@ -288,6 +288,7 @@
           <a:p>
             <a:fld id="{8B6FD7A7-9EE9-43C4-AE8D-5516C6DA394F}" type="slidenum">
               <a:rPr lang="en-IN" smtClean="0"/>
+              <a:t>‹#›</a:t>
             </a:fld>
             <a:endParaRPr lang="en-IN"/>
           </a:p>
@@ -400,12 +401,19 @@
         <p:cNvGrpSpPr/>
         <p:nvPr/>
       </p:nvGrpSpPr>
-      <p:grpSpPr/>
+      <p:grpSpPr>
+        <a:xfrm>
+          <a:off x="0" y="0"/>
+          <a:ext cx="0" cy="0"/>
+          <a:chOff x="0" y="0"/>
+          <a:chExt cx="0" cy="0"/>
+        </a:xfrm>
+      </p:grpSpPr>
       <p:sp>
         <p:nvSpPr>
           <p:cNvPr id="2" name="Slide Image Placeholder 1"/>
           <p:cNvSpPr>
-            <a:spLocks noGrp="1"/>
+            <a:spLocks noGrp="1" noRot="1" noChangeAspect="1"/>
           </p:cNvSpPr>
           <p:nvPr>
             <p:ph type="sldImg" idx="2"/>
@@ -426,6 +434,7 @@
         <p:spPr/>
         <p:txBody>
           <a:bodyPr/>
+          <a:lstStyle/>
           <a:p>
             <a:endParaRPr lang="en-US"/>
           </a:p>
@@ -440,7 +449,7 @@
 </file>
 
 <file path=ppt/slideLayouts/slideLayout1.xml><?xml version="1.0" encoding="utf-8"?>
-<p:sldLayout xmlns:a="http://schemas.openxmlformats.org/drawingml/2006/main" xmlns:r="http://schemas.openxmlformats.org/officeDocument/2006/relationships" xmlns:p="http://schemas.openxmlformats.org/presentationml/2006/main" type="obj" preserve="1" showMasterSp="0">
+<p:sldLayout xmlns:a="http://schemas.openxmlformats.org/drawingml/2006/main" xmlns:r="http://schemas.openxmlformats.org/officeDocument/2006/relationships" xmlns:p="http://schemas.openxmlformats.org/presentationml/2006/main" showMasterSp="0" type="obj" preserve="1">
   <p:cSld name="Title Slide">
     <p:bg>
       <p:bgPr>
@@ -501,7 +510,9 @@
         <p:txBody>
           <a:bodyPr wrap="square" lIns="0" tIns="0" rIns="0" bIns="0" rtlCol="0"/>
           <a:lstStyle/>
-          <a:p/>
+          <a:p>
+            <a:endParaRPr/>
+          </a:p>
         </p:txBody>
       </p:sp>
       <p:sp>
@@ -538,7 +549,9 @@
               </a:defRPr>
             </a:lvl1pPr>
           </a:lstStyle>
-          <a:p/>
+          <a:p>
+            <a:endParaRPr/>
+          </a:p>
         </p:txBody>
       </p:sp>
       <p:sp>
@@ -575,7 +588,9 @@
               </a:defRPr>
             </a:lvl1pPr>
           </a:lstStyle>
-          <a:p/>
+          <a:p>
+            <a:endParaRPr/>
+          </a:p>
         </p:txBody>
       </p:sp>
       <p:sp>
@@ -602,7 +617,9 @@
               </a:defRPr>
             </a:lvl1pPr>
           </a:lstStyle>
-          <a:p/>
+          <a:p>
+            <a:endParaRPr/>
+          </a:p>
         </p:txBody>
       </p:sp>
       <p:sp>
@@ -632,6 +649,7 @@
           <a:p>
             <a:fld id="{0451BD68-DA8D-4AA8-87F1-91C168BA370A}" type="datetime1">
               <a:rPr lang="en-US" smtClean="0"/>
+              <a:t>11/22/2025</a:t>
             </a:fld>
             <a:endParaRPr lang="en-US"/>
           </a:p>
@@ -664,6 +682,7 @@
           <a:p>
             <a:fld id="{B6F15528-21DE-4FAA-801E-634DDDAF4B2B}" type="slidenum">
               <a:rPr/>
+              <a:t>‹#›</a:t>
             </a:fld>
             <a:endParaRPr/>
           </a:p>
@@ -678,7 +697,7 @@
 </file>
 
 <file path=ppt/slideLayouts/slideLayout2.xml><?xml version="1.0" encoding="utf-8"?>
-<p:sldLayout xmlns:a="http://schemas.openxmlformats.org/drawingml/2006/main" xmlns:r="http://schemas.openxmlformats.org/officeDocument/2006/relationships" xmlns:p="http://schemas.openxmlformats.org/presentationml/2006/main" type="obj" preserve="1" showMasterSp="0">
+<p:sldLayout xmlns:a="http://schemas.openxmlformats.org/drawingml/2006/main" xmlns:r="http://schemas.openxmlformats.org/officeDocument/2006/relationships" xmlns:p="http://schemas.openxmlformats.org/presentationml/2006/main" showMasterSp="0" type="obj" preserve="1">
   <p:cSld name="Title and Content">
     <p:bg>
       <p:bgPr>
@@ -726,7 +745,9 @@
               </a:defRPr>
             </a:lvl1pPr>
           </a:lstStyle>
-          <a:p/>
+          <a:p>
+            <a:endParaRPr/>
+          </a:p>
         </p:txBody>
       </p:sp>
       <p:sp>
@@ -753,7 +774,9 @@
               </a:defRPr>
             </a:lvl1pPr>
           </a:lstStyle>
-          <a:p/>
+          <a:p>
+            <a:endParaRPr/>
+          </a:p>
         </p:txBody>
       </p:sp>
       <p:sp>
@@ -780,7 +803,9 @@
               </a:defRPr>
             </a:lvl1pPr>
           </a:lstStyle>
-          <a:p/>
+          <a:p>
+            <a:endParaRPr/>
+          </a:p>
         </p:txBody>
       </p:sp>
       <p:sp>
@@ -810,6 +835,7 @@
           <a:p>
             <a:fld id="{BCE994FB-CC5E-43BF-83B4-444AAB3E53DB}" type="datetime1">
               <a:rPr lang="en-US" smtClean="0"/>
+              <a:t>11/22/2025</a:t>
             </a:fld>
             <a:endParaRPr lang="en-US"/>
           </a:p>
@@ -842,6 +868,7 @@
           <a:p>
             <a:fld id="{B6F15528-21DE-4FAA-801E-634DDDAF4B2B}" type="slidenum">
               <a:rPr/>
+              <a:t>‹#›</a:t>
             </a:fld>
             <a:endParaRPr/>
           </a:p>
@@ -896,7 +923,9 @@
               </a:defRPr>
             </a:lvl1pPr>
           </a:lstStyle>
-          <a:p/>
+          <a:p>
+            <a:endParaRPr/>
+          </a:p>
         </p:txBody>
       </p:sp>
       <p:sp>
@@ -927,7 +956,9 @@
               <a:defRPr/>
             </a:lvl1pPr>
           </a:lstStyle>
-          <a:p/>
+          <a:p>
+            <a:endParaRPr/>
+          </a:p>
         </p:txBody>
       </p:sp>
       <p:sp>
@@ -958,7 +989,9 @@
               <a:defRPr/>
             </a:lvl1pPr>
           </a:lstStyle>
-          <a:p/>
+          <a:p>
+            <a:endParaRPr/>
+          </a:p>
         </p:txBody>
       </p:sp>
       <p:sp>
@@ -985,7 +1018,9 @@
               </a:defRPr>
             </a:lvl1pPr>
           </a:lstStyle>
-          <a:p/>
+          <a:p>
+            <a:endParaRPr/>
+          </a:p>
         </p:txBody>
       </p:sp>
       <p:sp>
@@ -1015,6 +1050,7 @@
           <a:p>
             <a:fld id="{7C374A6C-E57C-46BA-8C72-6F4877181ADC}" type="datetime1">
               <a:rPr lang="en-US" smtClean="0"/>
+              <a:t>11/22/2025</a:t>
             </a:fld>
             <a:endParaRPr lang="en-US"/>
           </a:p>
@@ -1047,6 +1083,7 @@
           <a:p>
             <a:fld id="{B6F15528-21DE-4FAA-801E-634DDDAF4B2B}" type="slidenum">
               <a:rPr/>
+              <a:t>‹#›</a:t>
             </a:fld>
             <a:endParaRPr/>
           </a:p>
@@ -1101,7 +1138,9 @@
               </a:defRPr>
             </a:lvl1pPr>
           </a:lstStyle>
-          <a:p/>
+          <a:p>
+            <a:endParaRPr/>
+          </a:p>
         </p:txBody>
       </p:sp>
       <p:sp>
@@ -1128,7 +1167,9 @@
               </a:defRPr>
             </a:lvl1pPr>
           </a:lstStyle>
-          <a:p/>
+          <a:p>
+            <a:endParaRPr/>
+          </a:p>
         </p:txBody>
       </p:sp>
       <p:sp>
@@ -1158,6 +1199,7 @@
           <a:p>
             <a:fld id="{779C0C1F-3C31-4E53-87B9-BE35C2C9E1C0}" type="datetime1">
               <a:rPr lang="en-US" smtClean="0"/>
+              <a:t>11/22/2025</a:t>
             </a:fld>
             <a:endParaRPr lang="en-US"/>
           </a:p>
@@ -1190,6 +1232,7 @@
           <a:p>
             <a:fld id="{B6F15528-21DE-4FAA-801E-634DDDAF4B2B}" type="slidenum">
               <a:rPr/>
+              <a:t>‹#›</a:t>
             </a:fld>
             <a:endParaRPr/>
           </a:p>
@@ -1244,7 +1287,9 @@
               </a:defRPr>
             </a:lvl1pPr>
           </a:lstStyle>
-          <a:p/>
+          <a:p>
+            <a:endParaRPr/>
+          </a:p>
         </p:txBody>
       </p:sp>
       <p:sp>
@@ -1274,6 +1319,7 @@
           <a:p>
             <a:fld id="{4F88E0E2-AC2F-4AD5-BB1C-918015B6CAAF}" type="datetime1">
               <a:rPr lang="en-US" smtClean="0"/>
+              <a:t>11/22/2025</a:t>
             </a:fld>
             <a:endParaRPr lang="en-US"/>
           </a:p>
@@ -1306,6 +1352,7 @@
           <a:p>
             <a:fld id="{B6F15528-21DE-4FAA-801E-634DDDAF4B2B}" type="slidenum">
               <a:rPr/>
+              <a:t>‹#›</a:t>
             </a:fld>
             <a:endParaRPr/>
           </a:p>
@@ -1389,7 +1436,9 @@
         <p:txBody>
           <a:bodyPr wrap="square" lIns="0" tIns="0" rIns="0" bIns="0" rtlCol="0"/>
           <a:lstStyle/>
-          <a:p/>
+          <a:p>
+            <a:endParaRPr/>
+          </a:p>
         </p:txBody>
       </p:sp>
       <p:sp>
@@ -1426,7 +1475,9 @@
               </a:defRPr>
             </a:lvl1pPr>
           </a:lstStyle>
-          <a:p/>
+          <a:p>
+            <a:endParaRPr/>
+          </a:p>
         </p:txBody>
       </p:sp>
       <p:sp>
@@ -1463,7 +1514,9 @@
               </a:defRPr>
             </a:lvl1pPr>
           </a:lstStyle>
-          <a:p/>
+          <a:p>
+            <a:endParaRPr/>
+          </a:p>
         </p:txBody>
       </p:sp>
       <p:sp>
@@ -1500,7 +1553,9 @@
               </a:defRPr>
             </a:lvl1pPr>
           </a:lstStyle>
-          <a:p/>
+          <a:p>
+            <a:endParaRPr/>
+          </a:p>
         </p:txBody>
       </p:sp>
       <p:sp>
@@ -1540,6 +1595,7 @@
           <a:p>
             <a:fld id="{FC8991DE-1AD3-462C-A4DC-4EC4919A7E91}" type="datetime1">
               <a:rPr lang="en-US" smtClean="0"/>
+              <a:t>11/22/2025</a:t>
             </a:fld>
             <a:endParaRPr lang="en-US"/>
           </a:p>
@@ -1582,6 +1638,7 @@
           <a:p>
             <a:fld id="{B6F15528-21DE-4FAA-801E-634DDDAF4B2B}" type="slidenum">
               <a:rPr/>
+              <a:t>‹#›</a:t>
             </a:fld>
             <a:endParaRPr/>
           </a:p>
@@ -1766,7 +1823,7 @@
           <p:nvPr/>
         </p:nvPicPr>
         <p:blipFill>
-          <a:blip r:embed="rId1" cstate="print"/>
+          <a:blip r:embed="rId3" cstate="print"/>
           <a:stretch>
             <a:fillRect/>
           </a:stretch>
@@ -1828,14 +1885,6 @@
               </a:rPr>
               <a:t>Advanced Concepts &amp; Best Practices</a:t>
             </a:r>
-            <a:endParaRPr lang="en-US" altLang="en-US" sz="4500">
-              <a:solidFill>
-                <a:schemeClr val="tx1"/>
-              </a:solidFill>
-              <a:latin typeface="Tahoma" panose="020B0604030504040204"/>
-              <a:ea typeface="Arial" panose="020B0604020202020204" pitchFamily="34" charset="0"/>
-              <a:cs typeface="Tahoma" panose="020B0604030504040204"/>
-            </a:endParaRPr>
           </a:p>
         </p:txBody>
       </p:sp>
@@ -1856,6 +1905,7 @@
           <a:p>
             <a:fld id="{B6F15528-21DE-4FAA-801E-634DDDAF4B2B}" type="slidenum">
               <a:rPr lang="en-IN" smtClean="0"/>
+              <a:t>1</a:t>
             </a:fld>
             <a:endParaRPr lang="en-IN"/>
           </a:p>
@@ -1869,7 +1919,7 @@
 </p:sld>
 </file>
 
-<file path=ppt/slides/slide2.xml><?xml version="1.0" encoding="utf-8"?>
+<file path=ppt/slides/slide10.xml><?xml version="1.0" encoding="utf-8"?>
 <p:sld xmlns:a="http://schemas.openxmlformats.org/drawingml/2006/main" xmlns:r="http://schemas.openxmlformats.org/officeDocument/2006/relationships" xmlns:p="http://schemas.openxmlformats.org/presentationml/2006/main">
   <p:cSld>
     <p:spTree>
@@ -1889,174 +1939,228 @@
       <p:sp>
         <p:nvSpPr>
           <p:cNvPr id="2" name="object 2"/>
-          <p:cNvSpPr txBox="1"/>
-          <p:nvPr/>
+          <p:cNvSpPr txBox="1">
+            <a:spLocks noGrp="1"/>
+          </p:cNvSpPr>
+          <p:nvPr>
+            <p:ph type="title"/>
+          </p:nvPr>
         </p:nvSpPr>
         <p:spPr>
           <a:xfrm>
-            <a:off x="101600" y="4693285"/>
-            <a:ext cx="6743065" cy="812800"/>
+            <a:off x="3200400" y="342900"/>
+            <a:ext cx="14864080" cy="1374140"/>
           </a:xfrm>
           <a:prstGeom prst="rect">
             <a:avLst/>
           </a:prstGeom>
         </p:spPr>
         <p:txBody>
-          <a:bodyPr vert="horz" wrap="square" lIns="0" tIns="12700" rIns="0" bIns="0" rtlCol="0">
+          <a:bodyPr vert="horz" wrap="square" lIns="0" tIns="349630" rIns="0" bIns="0" rtlCol="0">
             <a:spAutoFit/>
           </a:bodyPr>
           <a:lstStyle/>
           <a:p>
-            <a:pPr marL="12700">
+            <a:pPr marL="3072130" marR="5080" indent="-3015615" algn="ctr">
               <a:lnSpc>
-                <a:spcPct val="100000"/>
+                <a:spcPct val="101000"/>
               </a:lnSpc>
               <a:spcBef>
-                <a:spcPts val="100"/>
+                <a:spcPts val="25"/>
               </a:spcBef>
             </a:pPr>
             <a:r>
-              <a:rPr lang="en-US" altLang="en-US" sz="5200">
-                <a:latin typeface="Tahoma" panose="020B0604030504040204"/>
-                <a:cs typeface="Tahoma" panose="020B0604030504040204"/>
-              </a:rPr>
-              <a:t>State Normalization</a:t>
+              <a:rPr lang="en-US" altLang="en-US" sz="6600"/>
+              <a:t>Middleware and Store Configuration</a:t>
             </a:r>
-            <a:endParaRPr lang="en-US" altLang="en-US" sz="5200">
-              <a:latin typeface="Tahoma" panose="020B0604030504040204"/>
-              <a:cs typeface="Tahoma" panose="020B0604030504040204"/>
-            </a:endParaRPr>
-          </a:p>
-        </p:txBody>
-      </p:sp>
-      <p:sp>
-        <p:nvSpPr>
-          <p:cNvPr id="3" name="object 3"/>
-          <p:cNvSpPr txBox="1">
-            <a:spLocks noGrp="1"/>
-          </p:cNvSpPr>
-          <p:nvPr>
-            <p:ph type="ctrTitle"/>
-          </p:nvPr>
+          </a:p>
+        </p:txBody>
+      </p:sp>
+      <p:sp>
+        <p:nvSpPr>
+          <p:cNvPr id="3" name="Slide Number Placeholder 2"/>
+          <p:cNvSpPr>
+            <a:spLocks noGrp="1"/>
+          </p:cNvSpPr>
+          <p:nvPr>
+            <p:ph type="sldNum" sz="quarter" idx="7"/>
+          </p:nvPr>
+        </p:nvSpPr>
+        <p:spPr/>
+        <p:txBody>
+          <a:bodyPr/>
+          <a:lstStyle/>
+          <a:p>
+            <a:fld id="{B6F15528-21DE-4FAA-801E-634DDDAF4B2B}" type="slidenum">
+              <a:rPr lang="en-IN" smtClean="0"/>
+              <a:t>10</a:t>
+            </a:fld>
+            <a:endParaRPr lang="en-IN"/>
+          </a:p>
+        </p:txBody>
+      </p:sp>
+      <p:sp>
+        <p:nvSpPr>
+          <p:cNvPr id="4" name="Text Box 3"/>
+          <p:cNvSpPr txBox="1"/>
+          <p:nvPr/>
         </p:nvSpPr>
         <p:spPr>
           <a:xfrm>
-            <a:off x="7686040" y="4000500"/>
-            <a:ext cx="8465820" cy="2628265"/>
+            <a:off x="3886200" y="3086100"/>
+            <a:ext cx="13965555" cy="5169535"/>
           </a:xfrm>
           <a:prstGeom prst="rect">
             <a:avLst/>
           </a:prstGeom>
         </p:spPr>
         <p:txBody>
-          <a:bodyPr vert="horz" wrap="square" lIns="0" tIns="12700" rIns="0" bIns="0" rtlCol="0">
+          <a:bodyPr wrap="square">
             <a:spAutoFit/>
           </a:bodyPr>
           <a:lstStyle/>
           <a:p>
-            <a:pPr marL="12700">
-              <a:lnSpc>
-                <a:spcPct val="100000"/>
-              </a:lnSpc>
+            <a:pPr marL="914400" indent="0" algn="l" defTabSz="266700">
               <a:spcBef>
-                <a:spcPts val="100"/>
+                <a:spcPts val="500"/>
               </a:spcBef>
+              <a:spcAft>
+                <a:spcPts val="500"/>
+              </a:spcAft>
+              <a:buNone/>
             </a:pPr>
             <a:r>
-              <a:rPr lang="en-US" altLang="en-US" sz="3400" spc="-290" dirty="0">
-                <a:solidFill>
-                  <a:srgbClr val="F15B2A"/>
-                </a:solidFill>
-                <a:latin typeface="Arial Black" panose="020B0A04020102020204"/>
-                <a:cs typeface="Arial Black" panose="020B0A04020102020204"/>
+              <a:rPr lang="en-US" altLang="en-US" sz="4000" b="1">
+                <a:solidFill>
+                  <a:schemeClr val="bg2"/>
+                </a:solidFill>
+                <a:latin typeface="Times New Roman" panose="02020603050405020304"/>
+                <a:ea typeface="SimSun" panose="02010600030101010101" pitchFamily="2" charset="-122"/>
               </a:rPr>
-              <a:t> The problem with nested data from APIs</a:t>
+              <a:t>Built-in Middleware</a:t>
             </a:r>
-            <a:br>
-              <a:rPr lang="en-US" altLang="en-US" sz="3400" spc="-290" dirty="0">
-                <a:solidFill>
-                  <a:srgbClr val="F15B2A"/>
-                </a:solidFill>
-                <a:latin typeface="Arial Black" panose="020B0A04020102020204"/>
-                <a:cs typeface="Arial Black" panose="020B0A04020102020204"/>
+          </a:p>
+          <a:p>
+            <a:pPr marL="914400" indent="0" algn="l" defTabSz="266700">
+              <a:spcBef>
+                <a:spcPts val="500"/>
+              </a:spcBef>
+              <a:spcAft>
+                <a:spcPts val="500"/>
+              </a:spcAft>
+              <a:buNone/>
+            </a:pPr>
+            <a:endParaRPr lang="en-US" altLang="en-US" sz="4000" b="1">
+              <a:solidFill>
+                <a:schemeClr val="bg2"/>
+              </a:solidFill>
+              <a:latin typeface="Times New Roman" panose="02020603050405020304"/>
+              <a:ea typeface="SimSun" panose="02010600030101010101" pitchFamily="2" charset="-122"/>
+            </a:endParaRPr>
+          </a:p>
+          <a:p>
+            <a:pPr marL="2286000" lvl="2" indent="-457200" algn="l" defTabSz="266700">
+              <a:spcBef>
+                <a:spcPts val="500"/>
+              </a:spcBef>
+              <a:spcAft>
+                <a:spcPts val="500"/>
+              </a:spcAft>
+              <a:buFont typeface="Arial" panose="020B0604020202020204" pitchFamily="34" charset="0"/>
+              <a:buChar char="•"/>
+            </a:pPr>
+            <a:r>
+              <a:rPr lang="en-US" altLang="en-US" sz="4000" b="1">
+                <a:solidFill>
+                  <a:schemeClr val="bg2"/>
+                </a:solidFill>
+                <a:latin typeface="Times New Roman" panose="02020603050405020304"/>
+                <a:ea typeface="SimSun" panose="02010600030101010101" pitchFamily="2" charset="-122"/>
               </a:rPr>
-            </a:br>
-            <a:br>
-              <a:rPr lang="en-US" altLang="en-US" sz="3400" spc="-290" dirty="0">
-                <a:solidFill>
-                  <a:srgbClr val="F15B2A"/>
-                </a:solidFill>
-                <a:latin typeface="Arial Black" panose="020B0A04020102020204"/>
-                <a:cs typeface="Arial Black" panose="020B0A04020102020204"/>
+              <a:t>redux-thunk:</a:t>
+            </a:r>
+          </a:p>
+          <a:p>
+            <a:pPr marL="1828800" lvl="2" indent="0" algn="l" defTabSz="266700">
+              <a:spcBef>
+                <a:spcPts val="500"/>
+              </a:spcBef>
+              <a:spcAft>
+                <a:spcPts val="500"/>
+              </a:spcAft>
+              <a:buFont typeface="Arial" panose="020B0604020202020204" pitchFamily="34" charset="0"/>
+              <a:buNone/>
+            </a:pPr>
+            <a:endParaRPr lang="en-US" altLang="en-US" sz="4000" b="1">
+              <a:solidFill>
+                <a:schemeClr val="bg2"/>
+              </a:solidFill>
+              <a:latin typeface="Times New Roman" panose="02020603050405020304"/>
+              <a:ea typeface="SimSun" panose="02010600030101010101" pitchFamily="2" charset="-122"/>
+            </a:endParaRPr>
+          </a:p>
+          <a:p>
+            <a:pPr marL="2286000" lvl="2" indent="-457200" algn="l" defTabSz="266700">
+              <a:spcBef>
+                <a:spcPts val="500"/>
+              </a:spcBef>
+              <a:spcAft>
+                <a:spcPts val="500"/>
+              </a:spcAft>
+              <a:buFont typeface="Arial" panose="020B0604020202020204" pitchFamily="34" charset="0"/>
+              <a:buChar char="•"/>
+            </a:pPr>
+            <a:r>
+              <a:rPr lang="en-US" altLang="en-US" sz="4000" b="1">
+                <a:solidFill>
+                  <a:schemeClr val="bg2"/>
+                </a:solidFill>
+                <a:latin typeface="Times New Roman" panose="02020603050405020304"/>
+                <a:ea typeface="SimSun" panose="02010600030101010101" pitchFamily="2" charset="-122"/>
               </a:rPr>
-            </a:br>
+              <a:t>Redux DevTools Extension Middleware</a:t>
+            </a:r>
+          </a:p>
+          <a:p>
+            <a:pPr marL="2286000" lvl="2" indent="-457200" algn="l" defTabSz="266700">
+              <a:spcBef>
+                <a:spcPts val="500"/>
+              </a:spcBef>
+              <a:spcAft>
+                <a:spcPts val="500"/>
+              </a:spcAft>
+              <a:buFont typeface="Arial" panose="020B0604020202020204" pitchFamily="34" charset="0"/>
+              <a:buChar char="•"/>
+            </a:pPr>
+            <a:endParaRPr lang="en-US" altLang="en-US" sz="4000" b="1">
+              <a:solidFill>
+                <a:schemeClr val="bg2"/>
+              </a:solidFill>
+              <a:latin typeface="Times New Roman" panose="02020603050405020304"/>
+              <a:ea typeface="SimSun" panose="02010600030101010101" pitchFamily="2" charset="-122"/>
+            </a:endParaRPr>
+          </a:p>
+          <a:p>
+            <a:pPr marL="2286000" lvl="2" indent="-457200" algn="l" defTabSz="266700">
+              <a:spcBef>
+                <a:spcPts val="500"/>
+              </a:spcBef>
+              <a:spcAft>
+                <a:spcPts val="500"/>
+              </a:spcAft>
+              <a:buFont typeface="Arial" panose="020B0604020202020204" pitchFamily="34" charset="0"/>
+              <a:buChar char="•"/>
+            </a:pPr>
             <a:r>
-              <a:rPr lang="en-US" altLang="en-US" sz="3400" spc="-270" dirty="0">
-                <a:solidFill>
-                  <a:srgbClr val="F15B2A"/>
-                </a:solidFill>
-                <a:latin typeface="Arial Black" panose="020B0A04020102020204"/>
-                <a:cs typeface="Arial Black" panose="020B0A04020102020204"/>
+              <a:rPr lang="en-US" altLang="en-US" sz="4000" b="1">
+                <a:solidFill>
+                  <a:schemeClr val="bg2"/>
+                </a:solidFill>
+                <a:latin typeface="Times New Roman" panose="02020603050405020304"/>
+                <a:ea typeface="SimSun" panose="02010600030101010101" pitchFamily="2" charset="-122"/>
               </a:rPr>
-              <a:t>The Solution: Normalization</a:t>
+              <a:t>serializableCheck &amp; immutableCheck</a:t>
             </a:r>
-            <a:br>
-              <a:rPr lang="en-US" altLang="en-US" sz="3400" spc="-270" dirty="0">
-                <a:solidFill>
-                  <a:srgbClr val="F15B2A"/>
-                </a:solidFill>
-                <a:latin typeface="Arial Black" panose="020B0A04020102020204"/>
-                <a:cs typeface="Arial Black" panose="020B0A04020102020204"/>
-              </a:rPr>
-            </a:br>
-            <a:br>
-              <a:rPr lang="en-US" altLang="en-US" sz="3400" spc="-270" dirty="0">
-                <a:solidFill>
-                  <a:srgbClr val="F15B2A"/>
-                </a:solidFill>
-                <a:latin typeface="Arial Black" panose="020B0A04020102020204"/>
-                <a:cs typeface="Arial Black" panose="020B0A04020102020204"/>
-              </a:rPr>
-            </a:br>
-            <a:r>
-              <a:rPr lang="en-US" altLang="en-US" sz="3400" spc="-270" dirty="0">
-                <a:solidFill>
-                  <a:srgbClr val="F15B2A"/>
-                </a:solidFill>
-                <a:latin typeface="Arial Black" panose="020B0A04020102020204"/>
-                <a:cs typeface="Arial Black" panose="020B0A04020102020204"/>
-              </a:rPr>
-              <a:t>createEntityAdapter</a:t>
-            </a:r>
-            <a:endParaRPr lang="en-US" altLang="en-US" sz="3400" spc="-270" dirty="0">
-              <a:solidFill>
-                <a:srgbClr val="F15B2A"/>
-              </a:solidFill>
-              <a:latin typeface="Arial Black" panose="020B0A04020102020204"/>
-              <a:cs typeface="Arial Black" panose="020B0A04020102020204"/>
-            </a:endParaRPr>
-          </a:p>
-        </p:txBody>
-      </p:sp>
-      <p:sp>
-        <p:nvSpPr>
-          <p:cNvPr id="5" name="Slide Number Placeholder 4"/>
-          <p:cNvSpPr>
-            <a:spLocks noGrp="1"/>
-          </p:cNvSpPr>
-          <p:nvPr>
-            <p:ph type="sldNum" sz="quarter" idx="7"/>
-          </p:nvPr>
-        </p:nvSpPr>
-        <p:spPr/>
-        <p:txBody>
-          <a:bodyPr/>
-          <a:lstStyle/>
-          <a:p>
-            <a:fld id="{B6F15528-21DE-4FAA-801E-634DDDAF4B2B}" type="slidenum">
-              <a:rPr lang="en-IN" smtClean="0"/>
-            </a:fld>
-            <a:endParaRPr lang="en-IN"/>
           </a:p>
         </p:txBody>
       </p:sp>
@@ -2068,7 +2172,7 @@
 </p:sld>
 </file>
 
-<file path=ppt/slides/slide3.xml><?xml version="1.0" encoding="utf-8"?>
+<file path=ppt/slides/slide11.xml><?xml version="1.0" encoding="utf-8"?>
 <p:sld xmlns:a="http://schemas.openxmlformats.org/drawingml/2006/main" xmlns:r="http://schemas.openxmlformats.org/officeDocument/2006/relationships" xmlns:p="http://schemas.openxmlformats.org/presentationml/2006/main">
   <p:cSld>
     <p:spTree>
@@ -2087,104 +2191,6 @@
       </p:grpSpPr>
       <p:sp>
         <p:nvSpPr>
-          <p:cNvPr id="4" name="object 4"/>
-          <p:cNvSpPr txBox="1">
-            <a:spLocks noGrp="1"/>
-          </p:cNvSpPr>
-          <p:nvPr>
-            <p:ph type="title"/>
-          </p:nvPr>
-        </p:nvSpPr>
-        <p:spPr>
-          <a:xfrm>
-            <a:off x="3048000" y="3390900"/>
-            <a:ext cx="14474825" cy="2380615"/>
-          </a:xfrm>
-          <a:prstGeom prst="rect">
-            <a:avLst/>
-          </a:prstGeom>
-        </p:spPr>
-        <p:txBody>
-          <a:bodyPr vert="horz" wrap="square" lIns="0" tIns="349630" rIns="0" bIns="0" rtlCol="0" anchor="t" anchorCtr="0">
-            <a:spAutoFit/>
-          </a:bodyPr>
-          <a:lstStyle>
-            <a:lvl1pPr>
-              <a:defRPr sz="4800" b="0" i="0">
-                <a:solidFill>
-                  <a:schemeClr val="bg1"/>
-                </a:solidFill>
-                <a:latin typeface="Arial MT"/>
-                <a:ea typeface="+mj-ea"/>
-                <a:cs typeface="Arial MT"/>
-              </a:defRPr>
-            </a:lvl1pPr>
-          </a:lstStyle>
-          <a:p>
-            <a:pPr marL="12700" lvl="0" algn="ctr">
-              <a:spcBef>
-                <a:spcPts val="100"/>
-              </a:spcBef>
-              <a:buClrTx/>
-              <a:buSzTx/>
-              <a:buFontTx/>
-            </a:pPr>
-            <a:r>
-              <a:rPr lang="en-US" altLang="en-US" sz="4400">
-                <a:gradFill>
-                  <a:gsLst>
-                    <a:gs pos="50000">
-                      <a:schemeClr val="accent5"/>
-                    </a:gs>
-                    <a:gs pos="0">
-                      <a:schemeClr val="accent5">
-                        <a:lumMod val="25000"/>
-                        <a:lumOff val="75000"/>
-                      </a:schemeClr>
-                    </a:gs>
-                    <a:gs pos="100000">
-                      <a:schemeClr val="accent5">
-                        <a:lumMod val="85000"/>
-                      </a:schemeClr>
-                    </a:gs>
-                  </a:gsLst>
-                  <a:lin ang="5400000" scaled="1"/>
-                </a:gradFill>
-                <a:latin typeface="Arial Black" panose="020B0A04020102020204"/>
-                <a:cs typeface="Arial Black" panose="020B0A04020102020204"/>
-                <a:sym typeface="+mn-ea"/>
-              </a:rPr>
-              <a:t>Normalize an API response for a list of products and manage updates to a single product item.</a:t>
-            </a:r>
-            <a:endParaRPr lang="en-US" altLang="en-US" sz="4400">
-              <a:gradFill>
-                <a:gsLst>
-                  <a:gs pos="50000">
-                    <a:schemeClr val="accent5"/>
-                  </a:gs>
-                  <a:gs pos="0">
-                    <a:schemeClr val="accent5">
-                      <a:lumMod val="25000"/>
-                      <a:lumOff val="75000"/>
-                    </a:schemeClr>
-                  </a:gs>
-                  <a:gs pos="100000">
-                    <a:schemeClr val="accent5">
-                      <a:lumMod val="85000"/>
-                    </a:schemeClr>
-                  </a:gs>
-                </a:gsLst>
-                <a:lin ang="5400000" scaled="1"/>
-              </a:gradFill>
-              <a:latin typeface="Arial Black" panose="020B0A04020102020204"/>
-              <a:cs typeface="Arial Black" panose="020B0A04020102020204"/>
-              <a:sym typeface="+mn-ea"/>
-            </a:endParaRPr>
-          </a:p>
-        </p:txBody>
-      </p:sp>
-      <p:sp>
-        <p:nvSpPr>
           <p:cNvPr id="6" name="Slide Number Placeholder 5"/>
           <p:cNvSpPr>
             <a:spLocks noGrp="1"/>
@@ -2200,1334 +2206,7 @@
           <a:p>
             <a:fld id="{B6F15528-21DE-4FAA-801E-634DDDAF4B2B}" type="slidenum">
               <a:rPr lang="en-IN" smtClean="0"/>
-            </a:fld>
-            <a:endParaRPr lang="en-IN"/>
-          </a:p>
-        </p:txBody>
-      </p:sp>
-      <p:sp>
-        <p:nvSpPr>
-          <p:cNvPr id="7" name="object 2"/>
-          <p:cNvSpPr txBox="1">
-            <a:spLocks noGrp="1"/>
-          </p:cNvSpPr>
-          <p:nvPr/>
-        </p:nvSpPr>
-        <p:spPr>
-          <a:xfrm>
-            <a:off x="914400" y="342900"/>
-            <a:ext cx="14894560" cy="1026160"/>
-          </a:xfrm>
-          <a:prstGeom prst="rect">
-            <a:avLst/>
-          </a:prstGeom>
-        </p:spPr>
-        <p:txBody>
-          <a:bodyPr vert="horz" wrap="square" lIns="0" tIns="349630" rIns="0" bIns="0" rtlCol="0" anchor="t" anchorCtr="0">
-            <a:spAutoFit/>
-          </a:bodyPr>
-          <a:lstStyle>
-            <a:lvl1pPr>
-              <a:defRPr sz="4800" b="0" i="0">
-                <a:solidFill>
-                  <a:schemeClr val="bg1"/>
-                </a:solidFill>
-                <a:latin typeface="Arial MT"/>
-                <a:ea typeface="+mj-ea"/>
-                <a:cs typeface="Arial MT"/>
-              </a:defRPr>
-            </a:lvl1pPr>
-          </a:lstStyle>
-          <a:p>
-            <a:pPr marL="12700" algn="ctr">
-              <a:lnSpc>
-                <a:spcPct val="100000"/>
-              </a:lnSpc>
-              <a:spcBef>
-                <a:spcPts val="100"/>
-              </a:spcBef>
-              <a:buClrTx/>
-              <a:buSzTx/>
-              <a:buFontTx/>
-            </a:pPr>
-            <a:r>
-              <a:rPr lang="en-US" altLang="en-US" sz="4400">
-                <a:gradFill>
-                  <a:gsLst>
-                    <a:gs pos="50000">
-                      <a:schemeClr val="accent5"/>
-                    </a:gs>
-                    <a:gs pos="0">
-                      <a:schemeClr val="accent5">
-                        <a:lumMod val="25000"/>
-                        <a:lumOff val="75000"/>
-                      </a:schemeClr>
-                    </a:gs>
-                    <a:gs pos="100000">
-                      <a:schemeClr val="accent5">
-                        <a:lumMod val="85000"/>
-                      </a:schemeClr>
-                    </a:gs>
-                  </a:gsLst>
-                  <a:lin ang="5400000" scaled="1"/>
-                </a:gradFill>
-                <a:latin typeface="Arial Black" panose="020B0A04020102020204"/>
-                <a:cs typeface="Arial Black" panose="020B0A04020102020204"/>
-              </a:rPr>
-              <a:t>Hands-on Lab 4.1</a:t>
-            </a:r>
-            <a:endParaRPr lang="en-US" altLang="en-US" sz="4400">
-              <a:gradFill>
-                <a:gsLst>
-                  <a:gs pos="50000">
-                    <a:schemeClr val="accent5"/>
-                  </a:gs>
-                  <a:gs pos="0">
-                    <a:schemeClr val="accent5">
-                      <a:lumMod val="25000"/>
-                      <a:lumOff val="75000"/>
-                    </a:schemeClr>
-                  </a:gs>
-                  <a:gs pos="100000">
-                    <a:schemeClr val="accent5">
-                      <a:lumMod val="85000"/>
-                    </a:schemeClr>
-                  </a:gs>
-                </a:gsLst>
-                <a:lin ang="5400000" scaled="1"/>
-              </a:gradFill>
-              <a:latin typeface="Arial Black" panose="020B0A04020102020204"/>
-              <a:cs typeface="Arial Black" panose="020B0A04020102020204"/>
-            </a:endParaRPr>
-          </a:p>
-        </p:txBody>
-      </p:sp>
-    </p:spTree>
-  </p:cSld>
-  <p:clrMapOvr>
-    <a:masterClrMapping/>
-  </p:clrMapOvr>
-</p:sld>
-</file>
-
-<file path=ppt/slides/slide4.xml><?xml version="1.0" encoding="utf-8"?>
-<p:sld xmlns:a="http://schemas.openxmlformats.org/drawingml/2006/main" xmlns:r="http://schemas.openxmlformats.org/officeDocument/2006/relationships" xmlns:p="http://schemas.openxmlformats.org/presentationml/2006/main">
-  <p:cSld>
-    <p:spTree>
-      <p:nvGrpSpPr>
-        <p:cNvPr id="1" name=""/>
-        <p:cNvGrpSpPr/>
-        <p:nvPr/>
-      </p:nvGrpSpPr>
-      <p:grpSpPr>
-        <a:xfrm>
-          <a:off x="0" y="0"/>
-          <a:ext cx="0" cy="0"/>
-          <a:chOff x="0" y="0"/>
-          <a:chExt cx="0" cy="0"/>
-        </a:xfrm>
-      </p:grpSpPr>
-      <p:sp>
-        <p:nvSpPr>
-          <p:cNvPr id="2" name="object 2"/>
-          <p:cNvSpPr txBox="1">
-            <a:spLocks noGrp="1"/>
-          </p:cNvSpPr>
-          <p:nvPr>
-            <p:ph type="title"/>
-          </p:nvPr>
-        </p:nvSpPr>
-        <p:spPr>
-          <a:xfrm>
-            <a:off x="3200400" y="342900"/>
-            <a:ext cx="14864080" cy="1374140"/>
-          </a:xfrm>
-          <a:prstGeom prst="rect">
-            <a:avLst/>
-          </a:prstGeom>
-        </p:spPr>
-        <p:txBody>
-          <a:bodyPr vert="horz" wrap="square" lIns="0" tIns="349630" rIns="0" bIns="0" rtlCol="0">
-            <a:spAutoFit/>
-          </a:bodyPr>
-          <a:lstStyle/>
-          <a:p>
-            <a:pPr marL="3072130" marR="5080" indent="-3015615" algn="ctr">
-              <a:lnSpc>
-                <a:spcPct val="101000"/>
-              </a:lnSpc>
-              <a:spcBef>
-                <a:spcPts val="25"/>
-              </a:spcBef>
-            </a:pPr>
-            <a:r>
-              <a:rPr lang="en-US" altLang="en-US" sz="6600"/>
-              <a:t>Code Structure &amp; Organization</a:t>
-            </a:r>
-            <a:endParaRPr lang="en-US" altLang="en-US" sz="6600"/>
-          </a:p>
-        </p:txBody>
-      </p:sp>
-      <p:sp>
-        <p:nvSpPr>
-          <p:cNvPr id="3" name="Slide Number Placeholder 2"/>
-          <p:cNvSpPr>
-            <a:spLocks noGrp="1"/>
-          </p:cNvSpPr>
-          <p:nvPr>
-            <p:ph type="sldNum" sz="quarter" idx="7"/>
-          </p:nvPr>
-        </p:nvSpPr>
-        <p:spPr/>
-        <p:txBody>
-          <a:bodyPr/>
-          <a:lstStyle/>
-          <a:p>
-            <a:fld id="{B6F15528-21DE-4FAA-801E-634DDDAF4B2B}" type="slidenum">
-              <a:rPr lang="en-IN" smtClean="0"/>
-            </a:fld>
-            <a:endParaRPr lang="en-IN"/>
-          </a:p>
-        </p:txBody>
-      </p:sp>
-      <p:sp>
-        <p:nvSpPr>
-          <p:cNvPr id="4" name="Text Box 3"/>
-          <p:cNvSpPr txBox="1"/>
-          <p:nvPr/>
-        </p:nvSpPr>
-        <p:spPr>
-          <a:xfrm>
-            <a:off x="3962400" y="3086100"/>
-            <a:ext cx="13965555" cy="4297680"/>
-          </a:xfrm>
-          <a:prstGeom prst="rect">
-            <a:avLst/>
-          </a:prstGeom>
-        </p:spPr>
-        <p:txBody>
-          <a:bodyPr wrap="square">
-            <a:spAutoFit/>
-          </a:bodyPr>
-          <a:p>
-            <a:pPr marL="1371600" indent="-457200" algn="l" defTabSz="266700">
-              <a:spcBef>
-                <a:spcPts val="500"/>
-              </a:spcBef>
-              <a:spcAft>
-                <a:spcPts val="500"/>
-              </a:spcAft>
-              <a:buFont typeface="Arial" panose="020B0604020202020204" pitchFamily="34" charset="0"/>
-              <a:buChar char="•"/>
-            </a:pPr>
-            <a:r>
-              <a:rPr lang="en-US" altLang="en-US" sz="4000">
-                <a:solidFill>
-                  <a:schemeClr val="bg2"/>
-                </a:solidFill>
-                <a:latin typeface="Times New Roman" panose="02020603050405020304"/>
-                <a:ea typeface="SimSun" panose="02010600030101010101" pitchFamily="2" charset="-122"/>
-              </a:rPr>
-              <a:t>folder by type</a:t>
-            </a:r>
-            <a:endParaRPr lang="en-US" altLang="en-US" sz="4000">
-              <a:solidFill>
-                <a:schemeClr val="bg2"/>
-              </a:solidFill>
-              <a:latin typeface="Times New Roman" panose="02020603050405020304"/>
-              <a:ea typeface="SimSun" panose="02010600030101010101" pitchFamily="2" charset="-122"/>
-            </a:endParaRPr>
-          </a:p>
-          <a:p>
-            <a:pPr marL="914400" indent="0" algn="l" defTabSz="266700">
-              <a:spcBef>
-                <a:spcPts val="500"/>
-              </a:spcBef>
-              <a:spcAft>
-                <a:spcPts val="500"/>
-              </a:spcAft>
-              <a:buFont typeface="Arial" panose="020B0604020202020204" pitchFamily="34" charset="0"/>
-              <a:buNone/>
-            </a:pPr>
-            <a:endParaRPr lang="en-US" altLang="en-US" sz="4000">
-              <a:solidFill>
-                <a:schemeClr val="bg2"/>
-              </a:solidFill>
-              <a:latin typeface="Times New Roman" panose="02020603050405020304"/>
-              <a:ea typeface="SimSun" panose="02010600030101010101" pitchFamily="2" charset="-122"/>
-            </a:endParaRPr>
-          </a:p>
-          <a:p>
-            <a:pPr marL="1371600" indent="-457200" algn="l" defTabSz="266700">
-              <a:spcBef>
-                <a:spcPts val="500"/>
-              </a:spcBef>
-              <a:spcAft>
-                <a:spcPts val="500"/>
-              </a:spcAft>
-              <a:buFont typeface="Arial" panose="020B0604020202020204" pitchFamily="34" charset="0"/>
-              <a:buChar char="•"/>
-            </a:pPr>
-            <a:r>
-              <a:rPr lang="en-US" altLang="en-US" sz="4000">
-                <a:solidFill>
-                  <a:schemeClr val="bg2"/>
-                </a:solidFill>
-                <a:latin typeface="Times New Roman" panose="02020603050405020304"/>
-                <a:ea typeface="SimSun" panose="02010600030101010101" pitchFamily="2" charset="-122"/>
-              </a:rPr>
-              <a:t>feature-based (often called the Ducks Pattern)</a:t>
-            </a:r>
-            <a:endParaRPr lang="en-US" altLang="en-US" sz="4000">
-              <a:solidFill>
-                <a:schemeClr val="bg2"/>
-              </a:solidFill>
-              <a:latin typeface="Times New Roman" panose="02020603050405020304"/>
-              <a:ea typeface="SimSun" panose="02010600030101010101" pitchFamily="2" charset="-122"/>
-            </a:endParaRPr>
-          </a:p>
-          <a:p>
-            <a:pPr marL="1371600" indent="-457200" algn="l" defTabSz="266700">
-              <a:spcBef>
-                <a:spcPts val="500"/>
-              </a:spcBef>
-              <a:spcAft>
-                <a:spcPts val="500"/>
-              </a:spcAft>
-              <a:buFont typeface="Arial" panose="020B0604020202020204" pitchFamily="34" charset="0"/>
-              <a:buChar char="•"/>
-            </a:pPr>
-            <a:endParaRPr lang="en-US" altLang="en-US" sz="4000">
-              <a:solidFill>
-                <a:schemeClr val="bg2"/>
-              </a:solidFill>
-              <a:latin typeface="Times New Roman" panose="02020603050405020304"/>
-              <a:ea typeface="SimSun" panose="02010600030101010101" pitchFamily="2" charset="-122"/>
-            </a:endParaRPr>
-          </a:p>
-          <a:p>
-            <a:pPr marL="914400" indent="0" algn="l" defTabSz="266700">
-              <a:spcBef>
-                <a:spcPts val="500"/>
-              </a:spcBef>
-              <a:spcAft>
-                <a:spcPts val="500"/>
-              </a:spcAft>
-              <a:buNone/>
-            </a:pPr>
-            <a:r>
-              <a:rPr lang="en-US" altLang="en-US" sz="4000" b="1">
-                <a:solidFill>
-                  <a:schemeClr val="bg2"/>
-                </a:solidFill>
-                <a:latin typeface="Times New Roman" panose="02020603050405020304"/>
-                <a:ea typeface="SimSun" panose="02010600030101010101" pitchFamily="2" charset="-122"/>
-              </a:rPr>
-              <a:t>The recommended approach for modern, large-scale applications is the feature-based folder structure.</a:t>
-            </a:r>
-            <a:endParaRPr lang="en-US" altLang="en-US" sz="4000" b="1">
-              <a:solidFill>
-                <a:schemeClr val="bg2"/>
-              </a:solidFill>
-              <a:latin typeface="Times New Roman" panose="02020603050405020304"/>
-              <a:ea typeface="SimSun" panose="02010600030101010101" pitchFamily="2" charset="-122"/>
-            </a:endParaRPr>
-          </a:p>
-        </p:txBody>
-      </p:sp>
-    </p:spTree>
-  </p:cSld>
-  <p:clrMapOvr>
-    <a:masterClrMapping/>
-  </p:clrMapOvr>
-</p:sld>
-</file>
-
-<file path=ppt/slides/slide5.xml><?xml version="1.0" encoding="utf-8"?>
-<p:sld xmlns:a="http://schemas.openxmlformats.org/drawingml/2006/main" xmlns:r="http://schemas.openxmlformats.org/officeDocument/2006/relationships" xmlns:p="http://schemas.openxmlformats.org/presentationml/2006/main">
-  <p:cSld>
-    <p:spTree>
-      <p:nvGrpSpPr>
-        <p:cNvPr id="1" name=""/>
-        <p:cNvGrpSpPr/>
-        <p:nvPr/>
-      </p:nvGrpSpPr>
-      <p:grpSpPr>
-        <a:xfrm>
-          <a:off x="0" y="0"/>
-          <a:ext cx="0" cy="0"/>
-          <a:chOff x="0" y="0"/>
-          <a:chExt cx="0" cy="0"/>
-        </a:xfrm>
-      </p:grpSpPr>
-      <p:sp>
-        <p:nvSpPr>
-          <p:cNvPr id="2" name="object 2"/>
-          <p:cNvSpPr txBox="1">
-            <a:spLocks noGrp="1"/>
-          </p:cNvSpPr>
-          <p:nvPr>
-            <p:ph type="title"/>
-          </p:nvPr>
-        </p:nvSpPr>
-        <p:spPr>
-          <a:xfrm>
-            <a:off x="3200400" y="342900"/>
-            <a:ext cx="14864080" cy="1374140"/>
-          </a:xfrm>
-          <a:prstGeom prst="rect">
-            <a:avLst/>
-          </a:prstGeom>
-        </p:spPr>
-        <p:txBody>
-          <a:bodyPr vert="horz" wrap="square" lIns="0" tIns="349630" rIns="0" bIns="0" rtlCol="0">
-            <a:spAutoFit/>
-          </a:bodyPr>
-          <a:lstStyle/>
-          <a:p>
-            <a:pPr marL="3072130" marR="5080" indent="-3015615" algn="ctr">
-              <a:lnSpc>
-                <a:spcPct val="101000"/>
-              </a:lnSpc>
-              <a:spcBef>
-                <a:spcPts val="25"/>
-              </a:spcBef>
-            </a:pPr>
-            <a:r>
-              <a:rPr lang="en-US" altLang="en-US" sz="6600"/>
-              <a:t>Folder-by-Type</a:t>
-            </a:r>
-            <a:endParaRPr lang="en-US" altLang="en-US" sz="6600"/>
-          </a:p>
-        </p:txBody>
-      </p:sp>
-      <p:sp>
-        <p:nvSpPr>
-          <p:cNvPr id="3" name="Slide Number Placeholder 2"/>
-          <p:cNvSpPr>
-            <a:spLocks noGrp="1"/>
-          </p:cNvSpPr>
-          <p:nvPr>
-            <p:ph type="sldNum" sz="quarter" idx="7"/>
-          </p:nvPr>
-        </p:nvSpPr>
-        <p:spPr/>
-        <p:txBody>
-          <a:bodyPr/>
-          <a:lstStyle/>
-          <a:p>
-            <a:fld id="{B6F15528-21DE-4FAA-801E-634DDDAF4B2B}" type="slidenum">
-              <a:rPr lang="en-IN" smtClean="0"/>
-            </a:fld>
-            <a:endParaRPr lang="en-IN"/>
-          </a:p>
-        </p:txBody>
-      </p:sp>
-      <p:sp>
-        <p:nvSpPr>
-          <p:cNvPr id="4" name="Text Box 3"/>
-          <p:cNvSpPr txBox="1"/>
-          <p:nvPr/>
-        </p:nvSpPr>
-        <p:spPr>
-          <a:xfrm>
-            <a:off x="3962400" y="3086100"/>
-            <a:ext cx="13965555" cy="6657340"/>
-          </a:xfrm>
-          <a:prstGeom prst="rect">
-            <a:avLst/>
-          </a:prstGeom>
-        </p:spPr>
-        <p:txBody>
-          <a:bodyPr wrap="square">
-            <a:spAutoFit/>
-          </a:bodyPr>
-          <a:p>
-            <a:pPr marL="914400" indent="0" algn="l" defTabSz="266700">
-              <a:spcBef>
-                <a:spcPts val="500"/>
-              </a:spcBef>
-              <a:spcAft>
-                <a:spcPts val="500"/>
-              </a:spcAft>
-              <a:buFont typeface="Arial" panose="020B0604020202020204" pitchFamily="34" charset="0"/>
-              <a:buNone/>
-            </a:pPr>
-            <a:r>
-              <a:rPr lang="en-US" altLang="en-US" sz="4000" b="1">
-                <a:solidFill>
-                  <a:schemeClr val="bg2"/>
-                </a:solidFill>
-                <a:latin typeface="Times New Roman" panose="02020603050405020304"/>
-                <a:ea typeface="SimSun" panose="02010600030101010101" pitchFamily="2" charset="-122"/>
-              </a:rPr>
-              <a:t>Structure: All files of the same type are grouped together.</a:t>
-            </a:r>
-            <a:endParaRPr lang="en-US" altLang="en-US" sz="4000" b="1">
-              <a:solidFill>
-                <a:schemeClr val="bg2"/>
-              </a:solidFill>
-              <a:latin typeface="Times New Roman" panose="02020603050405020304"/>
-              <a:ea typeface="SimSun" panose="02010600030101010101" pitchFamily="2" charset="-122"/>
-            </a:endParaRPr>
-          </a:p>
-          <a:p>
-            <a:pPr marL="1371600" indent="-457200" algn="l" defTabSz="266700">
-              <a:spcBef>
-                <a:spcPts val="500"/>
-              </a:spcBef>
-              <a:spcAft>
-                <a:spcPts val="500"/>
-              </a:spcAft>
-              <a:buFont typeface="Arial" panose="020B0604020202020204" pitchFamily="34" charset="0"/>
-              <a:buChar char="•"/>
-            </a:pPr>
-            <a:endParaRPr lang="en-US" altLang="en-US" sz="4000" b="1">
-              <a:solidFill>
-                <a:schemeClr val="bg2"/>
-              </a:solidFill>
-              <a:latin typeface="Times New Roman" panose="02020603050405020304"/>
-              <a:ea typeface="SimSun" panose="02010600030101010101" pitchFamily="2" charset="-122"/>
-            </a:endParaRPr>
-          </a:p>
-          <a:p>
-            <a:pPr marL="1371600" indent="-457200" algn="l" defTabSz="266700">
-              <a:spcBef>
-                <a:spcPts val="500"/>
-              </a:spcBef>
-              <a:spcAft>
-                <a:spcPts val="500"/>
-              </a:spcAft>
-              <a:buFont typeface="Arial" panose="020B0604020202020204" pitchFamily="34" charset="0"/>
-              <a:buChar char="•"/>
-            </a:pPr>
-            <a:r>
-              <a:rPr lang="en-US" altLang="en-US" sz="4000" b="1">
-                <a:solidFill>
-                  <a:schemeClr val="bg2"/>
-                </a:solidFill>
-                <a:latin typeface="Times New Roman" panose="02020603050405020304"/>
-                <a:ea typeface="SimSun" panose="02010600030101010101" pitchFamily="2" charset="-122"/>
-              </a:rPr>
-              <a:t>/actions</a:t>
-            </a:r>
-            <a:endParaRPr lang="en-US" altLang="en-US" sz="4000" b="1">
-              <a:solidFill>
-                <a:schemeClr val="bg2"/>
-              </a:solidFill>
-              <a:latin typeface="Times New Roman" panose="02020603050405020304"/>
-              <a:ea typeface="SimSun" panose="02010600030101010101" pitchFamily="2" charset="-122"/>
-            </a:endParaRPr>
-          </a:p>
-          <a:p>
-            <a:pPr marL="1371600" indent="-457200" algn="l" defTabSz="266700">
-              <a:spcBef>
-                <a:spcPts val="500"/>
-              </a:spcBef>
-              <a:spcAft>
-                <a:spcPts val="500"/>
-              </a:spcAft>
-              <a:buFont typeface="Arial" panose="020B0604020202020204" pitchFamily="34" charset="0"/>
-              <a:buChar char="•"/>
-            </a:pPr>
-            <a:endParaRPr lang="en-US" altLang="en-US" sz="4000" b="1">
-              <a:solidFill>
-                <a:schemeClr val="bg2"/>
-              </a:solidFill>
-              <a:latin typeface="Times New Roman" panose="02020603050405020304"/>
-              <a:ea typeface="SimSun" panose="02010600030101010101" pitchFamily="2" charset="-122"/>
-            </a:endParaRPr>
-          </a:p>
-          <a:p>
-            <a:pPr marL="1371600" indent="-457200" algn="l" defTabSz="266700">
-              <a:spcBef>
-                <a:spcPts val="500"/>
-              </a:spcBef>
-              <a:spcAft>
-                <a:spcPts val="500"/>
-              </a:spcAft>
-              <a:buFont typeface="Arial" panose="020B0604020202020204" pitchFamily="34" charset="0"/>
-              <a:buChar char="•"/>
-            </a:pPr>
-            <a:r>
-              <a:rPr lang="en-US" altLang="en-US" sz="4000" b="1">
-                <a:solidFill>
-                  <a:schemeClr val="bg2"/>
-                </a:solidFill>
-                <a:latin typeface="Times New Roman" panose="02020603050405020304"/>
-                <a:ea typeface="SimSun" panose="02010600030101010101" pitchFamily="2" charset="-122"/>
-              </a:rPr>
-              <a:t>/reducers</a:t>
-            </a:r>
-            <a:endParaRPr lang="en-US" altLang="en-US" sz="4000" b="1">
-              <a:solidFill>
-                <a:schemeClr val="bg2"/>
-              </a:solidFill>
-              <a:latin typeface="Times New Roman" panose="02020603050405020304"/>
-              <a:ea typeface="SimSun" panose="02010600030101010101" pitchFamily="2" charset="-122"/>
-            </a:endParaRPr>
-          </a:p>
-          <a:p>
-            <a:pPr marL="1371600" indent="-457200" algn="l" defTabSz="266700">
-              <a:spcBef>
-                <a:spcPts val="500"/>
-              </a:spcBef>
-              <a:spcAft>
-                <a:spcPts val="500"/>
-              </a:spcAft>
-              <a:buFont typeface="Arial" panose="020B0604020202020204" pitchFamily="34" charset="0"/>
-              <a:buChar char="•"/>
-            </a:pPr>
-            <a:endParaRPr lang="en-US" altLang="en-US" sz="4000" b="1">
-              <a:solidFill>
-                <a:schemeClr val="bg2"/>
-              </a:solidFill>
-              <a:latin typeface="Times New Roman" panose="02020603050405020304"/>
-              <a:ea typeface="SimSun" panose="02010600030101010101" pitchFamily="2" charset="-122"/>
-            </a:endParaRPr>
-          </a:p>
-          <a:p>
-            <a:pPr marL="1371600" indent="-457200" algn="l" defTabSz="266700">
-              <a:spcBef>
-                <a:spcPts val="500"/>
-              </a:spcBef>
-              <a:spcAft>
-                <a:spcPts val="500"/>
-              </a:spcAft>
-              <a:buFont typeface="Arial" panose="020B0604020202020204" pitchFamily="34" charset="0"/>
-              <a:buChar char="•"/>
-            </a:pPr>
-            <a:r>
-              <a:rPr lang="en-US" altLang="en-US" sz="4000" b="1">
-                <a:solidFill>
-                  <a:schemeClr val="bg2"/>
-                </a:solidFill>
-                <a:latin typeface="Times New Roman" panose="02020603050405020304"/>
-                <a:ea typeface="SimSun" panose="02010600030101010101" pitchFamily="2" charset="-122"/>
-              </a:rPr>
-              <a:t>/store</a:t>
-            </a:r>
-            <a:endParaRPr lang="en-US" altLang="en-US" sz="4000" b="1">
-              <a:solidFill>
-                <a:schemeClr val="bg2"/>
-              </a:solidFill>
-              <a:latin typeface="Times New Roman" panose="02020603050405020304"/>
-              <a:ea typeface="SimSun" panose="02010600030101010101" pitchFamily="2" charset="-122"/>
-            </a:endParaRPr>
-          </a:p>
-          <a:p>
-            <a:pPr marL="1371600" indent="-457200" algn="l" defTabSz="266700">
-              <a:spcBef>
-                <a:spcPts val="500"/>
-              </a:spcBef>
-              <a:spcAft>
-                <a:spcPts val="500"/>
-              </a:spcAft>
-              <a:buFont typeface="Arial" panose="020B0604020202020204" pitchFamily="34" charset="0"/>
-              <a:buChar char="•"/>
-            </a:pPr>
-            <a:endParaRPr lang="en-US" altLang="en-US" sz="4000" b="1">
-              <a:solidFill>
-                <a:schemeClr val="bg2"/>
-              </a:solidFill>
-              <a:latin typeface="Times New Roman" panose="02020603050405020304"/>
-              <a:ea typeface="SimSun" panose="02010600030101010101" pitchFamily="2" charset="-122"/>
-            </a:endParaRPr>
-          </a:p>
-          <a:p>
-            <a:pPr marL="1371600" indent="-457200" algn="l" defTabSz="266700">
-              <a:spcBef>
-                <a:spcPts val="500"/>
-              </a:spcBef>
-              <a:spcAft>
-                <a:spcPts val="500"/>
-              </a:spcAft>
-              <a:buFont typeface="Arial" panose="020B0604020202020204" pitchFamily="34" charset="0"/>
-              <a:buChar char="•"/>
-            </a:pPr>
-            <a:r>
-              <a:rPr lang="en-US" altLang="en-US" sz="4000" b="1">
-                <a:solidFill>
-                  <a:schemeClr val="bg2"/>
-                </a:solidFill>
-                <a:latin typeface="Times New Roman" panose="02020603050405020304"/>
-                <a:ea typeface="SimSun" panose="02010600030101010101" pitchFamily="2" charset="-122"/>
-              </a:rPr>
-              <a:t>/components</a:t>
-            </a:r>
-            <a:endParaRPr lang="en-US" altLang="en-US" sz="4000" b="1">
-              <a:solidFill>
-                <a:schemeClr val="bg2"/>
-              </a:solidFill>
-              <a:latin typeface="Times New Roman" panose="02020603050405020304"/>
-              <a:ea typeface="SimSun" panose="02010600030101010101" pitchFamily="2" charset="-122"/>
-            </a:endParaRPr>
-          </a:p>
-        </p:txBody>
-      </p:sp>
-    </p:spTree>
-  </p:cSld>
-  <p:clrMapOvr>
-    <a:masterClrMapping/>
-  </p:clrMapOvr>
-</p:sld>
-</file>
-
-<file path=ppt/slides/slide6.xml><?xml version="1.0" encoding="utf-8"?>
-<p:sld xmlns:a="http://schemas.openxmlformats.org/drawingml/2006/main" xmlns:r="http://schemas.openxmlformats.org/officeDocument/2006/relationships" xmlns:p="http://schemas.openxmlformats.org/presentationml/2006/main">
-  <p:cSld>
-    <p:spTree>
-      <p:nvGrpSpPr>
-        <p:cNvPr id="1" name=""/>
-        <p:cNvGrpSpPr/>
-        <p:nvPr/>
-      </p:nvGrpSpPr>
-      <p:grpSpPr>
-        <a:xfrm>
-          <a:off x="0" y="0"/>
-          <a:ext cx="0" cy="0"/>
-          <a:chOff x="0" y="0"/>
-          <a:chExt cx="0" cy="0"/>
-        </a:xfrm>
-      </p:grpSpPr>
-      <p:sp>
-        <p:nvSpPr>
-          <p:cNvPr id="2" name="object 2"/>
-          <p:cNvSpPr txBox="1">
-            <a:spLocks noGrp="1"/>
-          </p:cNvSpPr>
-          <p:nvPr>
-            <p:ph type="title"/>
-          </p:nvPr>
-        </p:nvSpPr>
-        <p:spPr>
-          <a:xfrm>
-            <a:off x="3200400" y="342900"/>
-            <a:ext cx="14864080" cy="2399665"/>
-          </a:xfrm>
-          <a:prstGeom prst="rect">
-            <a:avLst/>
-          </a:prstGeom>
-        </p:spPr>
-        <p:txBody>
-          <a:bodyPr vert="horz" wrap="square" lIns="0" tIns="349630" rIns="0" bIns="0" rtlCol="0">
-            <a:spAutoFit/>
-          </a:bodyPr>
-          <a:lstStyle/>
-          <a:p>
-            <a:pPr marL="3072130" marR="5080" indent="-3015615" algn="ctr">
-              <a:lnSpc>
-                <a:spcPct val="101000"/>
-              </a:lnSpc>
-              <a:spcBef>
-                <a:spcPts val="25"/>
-              </a:spcBef>
-            </a:pPr>
-            <a:r>
-              <a:rPr lang="en-US" altLang="en-US" sz="6600"/>
-              <a:t>Feature-Based Folder Structure  (Ducks Pattern)</a:t>
-            </a:r>
-            <a:endParaRPr lang="en-US" altLang="en-US" sz="6600"/>
-          </a:p>
-        </p:txBody>
-      </p:sp>
-      <p:sp>
-        <p:nvSpPr>
-          <p:cNvPr id="3" name="Slide Number Placeholder 2"/>
-          <p:cNvSpPr>
-            <a:spLocks noGrp="1"/>
-          </p:cNvSpPr>
-          <p:nvPr>
-            <p:ph type="sldNum" sz="quarter" idx="7"/>
-          </p:nvPr>
-        </p:nvSpPr>
-        <p:spPr/>
-        <p:txBody>
-          <a:bodyPr/>
-          <a:lstStyle/>
-          <a:p>
-            <a:fld id="{B6F15528-21DE-4FAA-801E-634DDDAF4B2B}" type="slidenum">
-              <a:rPr lang="en-IN" smtClean="0"/>
-            </a:fld>
-            <a:endParaRPr lang="en-IN"/>
-          </a:p>
-        </p:txBody>
-      </p:sp>
-      <p:sp>
-        <p:nvSpPr>
-          <p:cNvPr id="4" name="Text Box 3"/>
-          <p:cNvSpPr txBox="1"/>
-          <p:nvPr/>
-        </p:nvSpPr>
-        <p:spPr>
-          <a:xfrm>
-            <a:off x="3962400" y="3086100"/>
-            <a:ext cx="13965555" cy="6529070"/>
-          </a:xfrm>
-          <a:prstGeom prst="rect">
-            <a:avLst/>
-          </a:prstGeom>
-        </p:spPr>
-        <p:txBody>
-          <a:bodyPr wrap="square">
-            <a:spAutoFit/>
-          </a:bodyPr>
-          <a:p>
-            <a:pPr marL="914400" indent="0" algn="l" defTabSz="266700">
-              <a:spcBef>
-                <a:spcPts val="500"/>
-              </a:spcBef>
-              <a:spcAft>
-                <a:spcPts val="500"/>
-              </a:spcAft>
-              <a:buFont typeface="Arial" panose="020B0604020202020204" pitchFamily="34" charset="0"/>
-              <a:buNone/>
-            </a:pPr>
-            <a:r>
-              <a:rPr lang="en-US" altLang="en-US" sz="4000" b="1">
-                <a:solidFill>
-                  <a:schemeClr val="bg2"/>
-                </a:solidFill>
-                <a:latin typeface="Times New Roman" panose="02020603050405020304"/>
-                <a:ea typeface="SimSun" panose="02010600030101010101" pitchFamily="2" charset="-122"/>
-              </a:rPr>
-              <a:t>Structure: All files related to a specific feature are grouped together in their own directory.</a:t>
-            </a:r>
-            <a:endParaRPr lang="en-US" altLang="en-US" sz="4000" b="1">
-              <a:solidFill>
-                <a:schemeClr val="bg2"/>
-              </a:solidFill>
-              <a:latin typeface="Times New Roman" panose="02020603050405020304"/>
-              <a:ea typeface="SimSun" panose="02010600030101010101" pitchFamily="2" charset="-122"/>
-            </a:endParaRPr>
-          </a:p>
-          <a:p>
-            <a:pPr marL="1485900" indent="-571500" algn="l" defTabSz="266700">
-              <a:spcBef>
-                <a:spcPts val="500"/>
-              </a:spcBef>
-              <a:spcAft>
-                <a:spcPts val="500"/>
-              </a:spcAft>
-              <a:buFont typeface="Arial" panose="020B0604020202020204" pitchFamily="34" charset="0"/>
-              <a:buChar char="•"/>
-            </a:pPr>
-            <a:r>
-              <a:rPr lang="en-US" altLang="en-US" sz="4000" b="1">
-                <a:solidFill>
-                  <a:schemeClr val="bg2"/>
-                </a:solidFill>
-                <a:latin typeface="Times New Roman" panose="02020603050405020304"/>
-                <a:ea typeface="SimSun" panose="02010600030101010101" pitchFamily="2" charset="-122"/>
-              </a:rPr>
-              <a:t>/features</a:t>
-            </a:r>
-            <a:endParaRPr lang="en-US" altLang="en-US" sz="4000" b="1">
-              <a:solidFill>
-                <a:schemeClr val="bg2"/>
-              </a:solidFill>
-              <a:latin typeface="Times New Roman" panose="02020603050405020304"/>
-              <a:ea typeface="SimSun" panose="02010600030101010101" pitchFamily="2" charset="-122"/>
-            </a:endParaRPr>
-          </a:p>
-          <a:p>
-            <a:pPr marL="1943100" lvl="1" indent="-571500" algn="l" defTabSz="266700">
-              <a:spcBef>
-                <a:spcPts val="500"/>
-              </a:spcBef>
-              <a:spcAft>
-                <a:spcPts val="500"/>
-              </a:spcAft>
-              <a:buFont typeface="Arial" panose="020B0604020202020204" pitchFamily="34" charset="0"/>
-              <a:buChar char="•"/>
-            </a:pPr>
-            <a:r>
-              <a:rPr lang="en-US" altLang="en-US" sz="4000" b="1">
-                <a:solidFill>
-                  <a:schemeClr val="bg2"/>
-                </a:solidFill>
-                <a:latin typeface="Times New Roman" panose="02020603050405020304"/>
-                <a:ea typeface="SimSun" panose="02010600030101010101" pitchFamily="2" charset="-122"/>
-              </a:rPr>
-              <a:t>/user</a:t>
-            </a:r>
-            <a:endParaRPr lang="en-US" altLang="en-US" sz="4000" b="1">
-              <a:solidFill>
-                <a:schemeClr val="bg2"/>
-              </a:solidFill>
-              <a:latin typeface="Times New Roman" panose="02020603050405020304"/>
-              <a:ea typeface="SimSun" panose="02010600030101010101" pitchFamily="2" charset="-122"/>
-            </a:endParaRPr>
-          </a:p>
-          <a:p>
-            <a:pPr marL="2400300" lvl="2" indent="-571500" algn="l" defTabSz="266700">
-              <a:spcBef>
-                <a:spcPts val="500"/>
-              </a:spcBef>
-              <a:spcAft>
-                <a:spcPts val="500"/>
-              </a:spcAft>
-              <a:buFont typeface="Arial" panose="020B0604020202020204" pitchFamily="34" charset="0"/>
-              <a:buChar char="•"/>
-            </a:pPr>
-            <a:r>
-              <a:rPr lang="en-US" altLang="en-US" sz="4000" b="1">
-                <a:solidFill>
-                  <a:schemeClr val="bg2"/>
-                </a:solidFill>
-                <a:latin typeface="Times New Roman" panose="02020603050405020304"/>
-                <a:ea typeface="SimSun" panose="02010600030101010101" pitchFamily="2" charset="-122"/>
-              </a:rPr>
-              <a:t>userSlice.ts</a:t>
-            </a:r>
-            <a:endParaRPr lang="en-US" altLang="en-US" sz="4000" b="1">
-              <a:solidFill>
-                <a:schemeClr val="bg2"/>
-              </a:solidFill>
-              <a:latin typeface="Times New Roman" panose="02020603050405020304"/>
-              <a:ea typeface="SimSun" panose="02010600030101010101" pitchFamily="2" charset="-122"/>
-            </a:endParaRPr>
-          </a:p>
-          <a:p>
-            <a:pPr marL="2400300" lvl="2" indent="-571500" algn="l" defTabSz="266700">
-              <a:spcBef>
-                <a:spcPts val="500"/>
-              </a:spcBef>
-              <a:spcAft>
-                <a:spcPts val="500"/>
-              </a:spcAft>
-              <a:buFont typeface="Arial" panose="020B0604020202020204" pitchFamily="34" charset="0"/>
-              <a:buChar char="•"/>
-            </a:pPr>
-            <a:r>
-              <a:rPr lang="en-US" altLang="en-US" sz="4000" b="1">
-                <a:solidFill>
-                  <a:schemeClr val="bg2"/>
-                </a:solidFill>
-                <a:latin typeface="Times New Roman" panose="02020603050405020304"/>
-                <a:ea typeface="SimSun" panose="02010600030101010101" pitchFamily="2" charset="-122"/>
-              </a:rPr>
-              <a:t>UserProfile.tsx</a:t>
-            </a:r>
-            <a:endParaRPr lang="en-US" altLang="en-US" sz="4000" b="1">
-              <a:solidFill>
-                <a:schemeClr val="bg2"/>
-              </a:solidFill>
-              <a:latin typeface="Times New Roman" panose="02020603050405020304"/>
-              <a:ea typeface="SimSun" panose="02010600030101010101" pitchFamily="2" charset="-122"/>
-            </a:endParaRPr>
-          </a:p>
-          <a:p>
-            <a:pPr marL="1943100" lvl="1" indent="-571500" algn="l" defTabSz="266700">
-              <a:spcBef>
-                <a:spcPts val="500"/>
-              </a:spcBef>
-              <a:spcAft>
-                <a:spcPts val="500"/>
-              </a:spcAft>
-              <a:buFont typeface="Arial" panose="020B0604020202020204" pitchFamily="34" charset="0"/>
-              <a:buChar char="•"/>
-            </a:pPr>
-            <a:r>
-              <a:rPr lang="en-US" altLang="en-US" sz="4000" b="1">
-                <a:solidFill>
-                  <a:schemeClr val="bg2"/>
-                </a:solidFill>
-                <a:latin typeface="Times New Roman" panose="02020603050405020304"/>
-                <a:ea typeface="SimSun" panose="02010600030101010101" pitchFamily="2" charset="-122"/>
-              </a:rPr>
-              <a:t>/products</a:t>
-            </a:r>
-            <a:endParaRPr lang="en-US" altLang="en-US" sz="4000" b="1">
-              <a:solidFill>
-                <a:schemeClr val="bg2"/>
-              </a:solidFill>
-              <a:latin typeface="Times New Roman" panose="02020603050405020304"/>
-              <a:ea typeface="SimSun" panose="02010600030101010101" pitchFamily="2" charset="-122"/>
-            </a:endParaRPr>
-          </a:p>
-          <a:p>
-            <a:pPr marL="2400300" lvl="2" indent="-571500" algn="l" defTabSz="266700">
-              <a:spcBef>
-                <a:spcPts val="500"/>
-              </a:spcBef>
-              <a:spcAft>
-                <a:spcPts val="500"/>
-              </a:spcAft>
-              <a:buFont typeface="Arial" panose="020B0604020202020204" pitchFamily="34" charset="0"/>
-              <a:buChar char="•"/>
-            </a:pPr>
-            <a:r>
-              <a:rPr lang="en-US" altLang="en-US" sz="4000" b="1">
-                <a:solidFill>
-                  <a:schemeClr val="bg2"/>
-                </a:solidFill>
-                <a:latin typeface="Times New Roman" panose="02020603050405020304"/>
-                <a:ea typeface="SimSun" panose="02010600030101010101" pitchFamily="2" charset="-122"/>
-              </a:rPr>
-              <a:t>productsSlice.ts</a:t>
-            </a:r>
-            <a:endParaRPr lang="en-US" altLang="en-US" sz="4000" b="1">
-              <a:solidFill>
-                <a:schemeClr val="bg2"/>
-              </a:solidFill>
-              <a:latin typeface="Times New Roman" panose="02020603050405020304"/>
-              <a:ea typeface="SimSun" panose="02010600030101010101" pitchFamily="2" charset="-122"/>
-            </a:endParaRPr>
-          </a:p>
-          <a:p>
-            <a:pPr marL="2400300" lvl="2" indent="-571500" algn="l" defTabSz="266700">
-              <a:spcBef>
-                <a:spcPts val="500"/>
-              </a:spcBef>
-              <a:spcAft>
-                <a:spcPts val="500"/>
-              </a:spcAft>
-              <a:buFont typeface="Arial" panose="020B0604020202020204" pitchFamily="34" charset="0"/>
-              <a:buChar char="•"/>
-            </a:pPr>
-            <a:r>
-              <a:rPr lang="en-US" altLang="en-US" sz="4000" b="1">
-                <a:solidFill>
-                  <a:schemeClr val="bg2"/>
-                </a:solidFill>
-                <a:latin typeface="Times New Roman" panose="02020603050405020304"/>
-                <a:ea typeface="SimSun" panose="02010600030101010101" pitchFamily="2" charset="-122"/>
-              </a:rPr>
-              <a:t>ProductList.tsx</a:t>
-            </a:r>
-            <a:endParaRPr lang="en-US" altLang="en-US" sz="4000" b="1">
-              <a:solidFill>
-                <a:schemeClr val="bg2"/>
-              </a:solidFill>
-              <a:latin typeface="Times New Roman" panose="02020603050405020304"/>
-              <a:ea typeface="SimSun" panose="02010600030101010101" pitchFamily="2" charset="-122"/>
-            </a:endParaRPr>
-          </a:p>
-        </p:txBody>
-      </p:sp>
-    </p:spTree>
-  </p:cSld>
-  <p:clrMapOvr>
-    <a:masterClrMapping/>
-  </p:clrMapOvr>
-</p:sld>
-</file>
-
-<file path=ppt/slides/slide7.xml><?xml version="1.0" encoding="utf-8"?>
-<p:sld xmlns:a="http://schemas.openxmlformats.org/drawingml/2006/main" xmlns:r="http://schemas.openxmlformats.org/officeDocument/2006/relationships" xmlns:p="http://schemas.openxmlformats.org/presentationml/2006/main">
-  <p:cSld>
-    <p:spTree>
-      <p:nvGrpSpPr>
-        <p:cNvPr id="1" name=""/>
-        <p:cNvGrpSpPr/>
-        <p:nvPr/>
-      </p:nvGrpSpPr>
-      <p:grpSpPr>
-        <a:xfrm>
-          <a:off x="0" y="0"/>
-          <a:ext cx="0" cy="0"/>
-          <a:chOff x="0" y="0"/>
-          <a:chExt cx="0" cy="0"/>
-        </a:xfrm>
-      </p:grpSpPr>
-      <p:sp>
-        <p:nvSpPr>
-          <p:cNvPr id="2" name="object 2"/>
-          <p:cNvSpPr txBox="1">
-            <a:spLocks noGrp="1"/>
-          </p:cNvSpPr>
-          <p:nvPr>
-            <p:ph type="title"/>
-          </p:nvPr>
-        </p:nvSpPr>
-        <p:spPr>
-          <a:xfrm>
-            <a:off x="3200400" y="342900"/>
-            <a:ext cx="14864080" cy="1374140"/>
-          </a:xfrm>
-          <a:prstGeom prst="rect">
-            <a:avLst/>
-          </a:prstGeom>
-        </p:spPr>
-        <p:txBody>
-          <a:bodyPr vert="horz" wrap="square" lIns="0" tIns="349630" rIns="0" bIns="0" rtlCol="0">
-            <a:spAutoFit/>
-          </a:bodyPr>
-          <a:lstStyle/>
-          <a:p>
-            <a:pPr marL="3072130" marR="5080" indent="-3015615" algn="ctr">
-              <a:lnSpc>
-                <a:spcPct val="101000"/>
-              </a:lnSpc>
-              <a:spcBef>
-                <a:spcPts val="25"/>
-              </a:spcBef>
-            </a:pPr>
-            <a:r>
-              <a:rPr lang="en-US" altLang="en-US" sz="6600"/>
-              <a:t>Middleware and Store Configuration</a:t>
-            </a:r>
-            <a:endParaRPr lang="en-US" altLang="en-US" sz="6600"/>
-          </a:p>
-        </p:txBody>
-      </p:sp>
-      <p:sp>
-        <p:nvSpPr>
-          <p:cNvPr id="3" name="Slide Number Placeholder 2"/>
-          <p:cNvSpPr>
-            <a:spLocks noGrp="1"/>
-          </p:cNvSpPr>
-          <p:nvPr>
-            <p:ph type="sldNum" sz="quarter" idx="7"/>
-          </p:nvPr>
-        </p:nvSpPr>
-        <p:spPr/>
-        <p:txBody>
-          <a:bodyPr/>
-          <a:lstStyle/>
-          <a:p>
-            <a:fld id="{B6F15528-21DE-4FAA-801E-634DDDAF4B2B}" type="slidenum">
-              <a:rPr lang="en-IN" smtClean="0"/>
-            </a:fld>
-            <a:endParaRPr lang="en-IN"/>
-          </a:p>
-        </p:txBody>
-      </p:sp>
-      <p:sp>
-        <p:nvSpPr>
-          <p:cNvPr id="4" name="Text Box 3"/>
-          <p:cNvSpPr txBox="1"/>
-          <p:nvPr/>
-        </p:nvSpPr>
-        <p:spPr>
-          <a:xfrm>
-            <a:off x="3886200" y="3086100"/>
-            <a:ext cx="13965555" cy="5169535"/>
-          </a:xfrm>
-          <a:prstGeom prst="rect">
-            <a:avLst/>
-          </a:prstGeom>
-        </p:spPr>
-        <p:txBody>
-          <a:bodyPr wrap="square">
-            <a:spAutoFit/>
-          </a:bodyPr>
-          <a:p>
-            <a:pPr marL="914400" indent="0" algn="l" defTabSz="266700">
-              <a:spcBef>
-                <a:spcPts val="500"/>
-              </a:spcBef>
-              <a:spcAft>
-                <a:spcPts val="500"/>
-              </a:spcAft>
-              <a:buNone/>
-            </a:pPr>
-            <a:r>
-              <a:rPr lang="en-US" altLang="en-US" sz="4000" b="1">
-                <a:solidFill>
-                  <a:schemeClr val="bg2"/>
-                </a:solidFill>
-                <a:latin typeface="Times New Roman" panose="02020603050405020304"/>
-                <a:ea typeface="SimSun" panose="02010600030101010101" pitchFamily="2" charset="-122"/>
-              </a:rPr>
-              <a:t>Built-in Middleware</a:t>
-            </a:r>
-            <a:endParaRPr lang="en-US" altLang="en-US" sz="4000" b="1">
-              <a:solidFill>
-                <a:schemeClr val="bg2"/>
-              </a:solidFill>
-              <a:latin typeface="Times New Roman" panose="02020603050405020304"/>
-              <a:ea typeface="SimSun" panose="02010600030101010101" pitchFamily="2" charset="-122"/>
-            </a:endParaRPr>
-          </a:p>
-          <a:p>
-            <a:pPr marL="914400" indent="0" algn="l" defTabSz="266700">
-              <a:spcBef>
-                <a:spcPts val="500"/>
-              </a:spcBef>
-              <a:spcAft>
-                <a:spcPts val="500"/>
-              </a:spcAft>
-              <a:buNone/>
-            </a:pPr>
-            <a:endParaRPr lang="en-US" altLang="en-US" sz="4000" b="1">
-              <a:solidFill>
-                <a:schemeClr val="bg2"/>
-              </a:solidFill>
-              <a:latin typeface="Times New Roman" panose="02020603050405020304"/>
-              <a:ea typeface="SimSun" panose="02010600030101010101" pitchFamily="2" charset="-122"/>
-            </a:endParaRPr>
-          </a:p>
-          <a:p>
-            <a:pPr marL="2286000" lvl="2" indent="-457200" algn="l" defTabSz="266700">
-              <a:spcBef>
-                <a:spcPts val="500"/>
-              </a:spcBef>
-              <a:spcAft>
-                <a:spcPts val="500"/>
-              </a:spcAft>
-              <a:buFont typeface="Arial" panose="020B0604020202020204" pitchFamily="34" charset="0"/>
-              <a:buChar char="•"/>
-            </a:pPr>
-            <a:r>
-              <a:rPr lang="en-US" altLang="en-US" sz="4000" b="1">
-                <a:solidFill>
-                  <a:schemeClr val="bg2"/>
-                </a:solidFill>
-                <a:latin typeface="Times New Roman" panose="02020603050405020304"/>
-                <a:ea typeface="SimSun" panose="02010600030101010101" pitchFamily="2" charset="-122"/>
-              </a:rPr>
-              <a:t>redux-thunk:</a:t>
-            </a:r>
-            <a:endParaRPr lang="en-US" altLang="en-US" sz="4000" b="1">
-              <a:solidFill>
-                <a:schemeClr val="bg2"/>
-              </a:solidFill>
-              <a:latin typeface="Times New Roman" panose="02020603050405020304"/>
-              <a:ea typeface="SimSun" panose="02010600030101010101" pitchFamily="2" charset="-122"/>
-            </a:endParaRPr>
-          </a:p>
-          <a:p>
-            <a:pPr marL="1828800" lvl="2" indent="0" algn="l" defTabSz="266700">
-              <a:spcBef>
-                <a:spcPts val="500"/>
-              </a:spcBef>
-              <a:spcAft>
-                <a:spcPts val="500"/>
-              </a:spcAft>
-              <a:buFont typeface="Arial" panose="020B0604020202020204" pitchFamily="34" charset="0"/>
-              <a:buNone/>
-            </a:pPr>
-            <a:endParaRPr lang="en-US" altLang="en-US" sz="4000" b="1">
-              <a:solidFill>
-                <a:schemeClr val="bg2"/>
-              </a:solidFill>
-              <a:latin typeface="Times New Roman" panose="02020603050405020304"/>
-              <a:ea typeface="SimSun" panose="02010600030101010101" pitchFamily="2" charset="-122"/>
-            </a:endParaRPr>
-          </a:p>
-          <a:p>
-            <a:pPr marL="2286000" lvl="2" indent="-457200" algn="l" defTabSz="266700">
-              <a:spcBef>
-                <a:spcPts val="500"/>
-              </a:spcBef>
-              <a:spcAft>
-                <a:spcPts val="500"/>
-              </a:spcAft>
-              <a:buFont typeface="Arial" panose="020B0604020202020204" pitchFamily="34" charset="0"/>
-              <a:buChar char="•"/>
-            </a:pPr>
-            <a:r>
-              <a:rPr lang="en-US" altLang="en-US" sz="4000" b="1">
-                <a:solidFill>
-                  <a:schemeClr val="bg2"/>
-                </a:solidFill>
-                <a:latin typeface="Times New Roman" panose="02020603050405020304"/>
-                <a:ea typeface="SimSun" panose="02010600030101010101" pitchFamily="2" charset="-122"/>
-              </a:rPr>
-              <a:t>Redux DevTools Extension Middleware</a:t>
-            </a:r>
-            <a:endParaRPr lang="en-US" altLang="en-US" sz="4000" b="1">
-              <a:solidFill>
-                <a:schemeClr val="bg2"/>
-              </a:solidFill>
-              <a:latin typeface="Times New Roman" panose="02020603050405020304"/>
-              <a:ea typeface="SimSun" panose="02010600030101010101" pitchFamily="2" charset="-122"/>
-            </a:endParaRPr>
-          </a:p>
-          <a:p>
-            <a:pPr marL="2286000" lvl="2" indent="-457200" algn="l" defTabSz="266700">
-              <a:spcBef>
-                <a:spcPts val="500"/>
-              </a:spcBef>
-              <a:spcAft>
-                <a:spcPts val="500"/>
-              </a:spcAft>
-              <a:buFont typeface="Arial" panose="020B0604020202020204" pitchFamily="34" charset="0"/>
-              <a:buChar char="•"/>
-            </a:pPr>
-            <a:endParaRPr lang="en-US" altLang="en-US" sz="4000" b="1">
-              <a:solidFill>
-                <a:schemeClr val="bg2"/>
-              </a:solidFill>
-              <a:latin typeface="Times New Roman" panose="02020603050405020304"/>
-              <a:ea typeface="SimSun" panose="02010600030101010101" pitchFamily="2" charset="-122"/>
-            </a:endParaRPr>
-          </a:p>
-          <a:p>
-            <a:pPr marL="2286000" lvl="2" indent="-457200" algn="l" defTabSz="266700">
-              <a:spcBef>
-                <a:spcPts val="500"/>
-              </a:spcBef>
-              <a:spcAft>
-                <a:spcPts val="500"/>
-              </a:spcAft>
-              <a:buFont typeface="Arial" panose="020B0604020202020204" pitchFamily="34" charset="0"/>
-              <a:buChar char="•"/>
-            </a:pPr>
-            <a:r>
-              <a:rPr lang="en-US" altLang="en-US" sz="4000" b="1">
-                <a:solidFill>
-                  <a:schemeClr val="bg2"/>
-                </a:solidFill>
-                <a:latin typeface="Times New Roman" panose="02020603050405020304"/>
-                <a:ea typeface="SimSun" panose="02010600030101010101" pitchFamily="2" charset="-122"/>
-              </a:rPr>
-              <a:t>serializableCheck &amp; immutableCheck</a:t>
-            </a:r>
-            <a:endParaRPr lang="en-US" altLang="en-US" sz="4000" b="1">
-              <a:solidFill>
-                <a:schemeClr val="bg2"/>
-              </a:solidFill>
-              <a:latin typeface="Times New Roman" panose="02020603050405020304"/>
-              <a:ea typeface="SimSun" panose="02010600030101010101" pitchFamily="2" charset="-122"/>
-            </a:endParaRPr>
-          </a:p>
-        </p:txBody>
-      </p:sp>
-    </p:spTree>
-  </p:cSld>
-  <p:clrMapOvr>
-    <a:masterClrMapping/>
-  </p:clrMapOvr>
-</p:sld>
-</file>
-
-<file path=ppt/slides/slide8.xml><?xml version="1.0" encoding="utf-8"?>
-<p:sld xmlns:a="http://schemas.openxmlformats.org/drawingml/2006/main" xmlns:r="http://schemas.openxmlformats.org/officeDocument/2006/relationships" xmlns:p="http://schemas.openxmlformats.org/presentationml/2006/main">
-  <p:cSld>
-    <p:spTree>
-      <p:nvGrpSpPr>
-        <p:cNvPr id="1" name=""/>
-        <p:cNvGrpSpPr/>
-        <p:nvPr/>
-      </p:nvGrpSpPr>
-      <p:grpSpPr>
-        <a:xfrm>
-          <a:off x="0" y="0"/>
-          <a:ext cx="0" cy="0"/>
-          <a:chOff x="0" y="0"/>
-          <a:chExt cx="0" cy="0"/>
-        </a:xfrm>
-      </p:grpSpPr>
-      <p:sp>
-        <p:nvSpPr>
-          <p:cNvPr id="6" name="Slide Number Placeholder 5"/>
-          <p:cNvSpPr>
-            <a:spLocks noGrp="1"/>
-          </p:cNvSpPr>
-          <p:nvPr>
-            <p:ph type="sldNum" sz="quarter" idx="7"/>
-          </p:nvPr>
-        </p:nvSpPr>
-        <p:spPr/>
-        <p:txBody>
-          <a:bodyPr/>
-          <a:lstStyle/>
-          <a:p>
-            <a:fld id="{B6F15528-21DE-4FAA-801E-634DDDAF4B2B}" type="slidenum">
-              <a:rPr lang="en-IN" smtClean="0"/>
+              <a:t>11</a:t>
             </a:fld>
             <a:endParaRPr lang="en-IN"/>
           </a:p>
@@ -3604,29 +2283,6 @@
               </a:rPr>
               <a:t> Redux DevTools Extension </a:t>
             </a:r>
-            <a:endParaRPr lang="en-US" altLang="en-US" sz="4400">
-              <a:gradFill>
-                <a:gsLst>
-                  <a:gs pos="50000">
-                    <a:schemeClr val="accent5"/>
-                  </a:gs>
-                  <a:gs pos="0">
-                    <a:schemeClr val="accent5">
-                      <a:lumMod val="25000"/>
-                      <a:lumOff val="75000"/>
-                    </a:schemeClr>
-                  </a:gs>
-                  <a:gs pos="100000">
-                    <a:schemeClr val="accent5">
-                      <a:lumMod val="85000"/>
-                    </a:schemeClr>
-                  </a:gs>
-                </a:gsLst>
-                <a:lin ang="5400000" scaled="1"/>
-              </a:gradFill>
-              <a:latin typeface="Arial Black" panose="020B0A04020102020204"/>
-              <a:cs typeface="Arial Black" panose="020B0A04020102020204"/>
-            </a:endParaRPr>
           </a:p>
         </p:txBody>
       </p:sp>
@@ -3940,37 +2596,1523 @@
               </a:rPr>
               <a:t>Performance Monitoring</a:t>
             </a:r>
-            <a:endParaRPr lang="en-US" altLang="en-US" sz="4400">
-              <a:ln w="12700">
-                <a:solidFill>
-                  <a:schemeClr val="accent3">
-                    <a:lumMod val="50000"/>
-                  </a:schemeClr>
-                </a:solidFill>
-                <a:prstDash val="solid"/>
-              </a:ln>
-              <a:pattFill prst="narHorz">
-                <a:fgClr>
-                  <a:schemeClr val="accent3"/>
-                </a:fgClr>
-                <a:bgClr>
-                  <a:schemeClr val="accent3">
-                    <a:lumMod val="40000"/>
-                    <a:lumOff val="60000"/>
-                  </a:schemeClr>
-                </a:bgClr>
-              </a:pattFill>
-              <a:effectLst>
-                <a:innerShdw blurRad="177800">
-                  <a:schemeClr val="accent3">
-                    <a:lumMod val="50000"/>
-                  </a:schemeClr>
-                </a:innerShdw>
-              </a:effectLst>
-              <a:latin typeface="Arial Black" panose="020B0A04020102020204"/>
-              <a:cs typeface="Arial Black" panose="020B0A04020102020204"/>
-              <a:sym typeface="+mn-ea"/>
+          </a:p>
+        </p:txBody>
+      </p:sp>
+    </p:spTree>
+  </p:cSld>
+  <p:clrMapOvr>
+    <a:masterClrMapping/>
+  </p:clrMapOvr>
+</p:sld>
+</file>
+
+<file path=ppt/slides/slide12.xml><?xml version="1.0" encoding="utf-8"?>
+<p:sld xmlns:a="http://schemas.openxmlformats.org/drawingml/2006/main" xmlns:r="http://schemas.openxmlformats.org/officeDocument/2006/relationships" xmlns:p="http://schemas.openxmlformats.org/presentationml/2006/main">
+  <p:cSld>
+    <p:spTree>
+      <p:nvGrpSpPr>
+        <p:cNvPr id="1" name=""/>
+        <p:cNvGrpSpPr/>
+        <p:nvPr/>
+      </p:nvGrpSpPr>
+      <p:grpSpPr>
+        <a:xfrm>
+          <a:off x="0" y="0"/>
+          <a:ext cx="0" cy="0"/>
+          <a:chOff x="0" y="0"/>
+          <a:chExt cx="0" cy="0"/>
+        </a:xfrm>
+      </p:grpSpPr>
+      <p:sp>
+        <p:nvSpPr>
+          <p:cNvPr id="2" name="object 2"/>
+          <p:cNvSpPr txBox="1">
+            <a:spLocks noGrp="1"/>
+          </p:cNvSpPr>
+          <p:nvPr>
+            <p:ph type="title"/>
+          </p:nvPr>
+        </p:nvSpPr>
+        <p:spPr>
+          <a:xfrm>
+            <a:off x="3284220" y="3740150"/>
+            <a:ext cx="14862175" cy="2255520"/>
+          </a:xfrm>
+          <a:prstGeom prst="rect">
+            <a:avLst/>
+          </a:prstGeom>
+        </p:spPr>
+        <p:txBody>
+          <a:bodyPr vert="horz" wrap="square" lIns="0" tIns="508508" rIns="0" bIns="0" rtlCol="0">
+            <a:spAutoFit/>
+          </a:bodyPr>
+          <a:lstStyle/>
+          <a:p>
+            <a:pPr algn="ctr">
+              <a:lnSpc>
+                <a:spcPts val="5735"/>
+              </a:lnSpc>
+              <a:spcBef>
+                <a:spcPts val="100"/>
+              </a:spcBef>
+            </a:pPr>
+            <a:r>
+              <a:rPr dirty="0"/>
+              <a:t>Next</a:t>
+            </a:r>
+            <a:r>
+              <a:rPr spc="-140" dirty="0"/>
+              <a:t> </a:t>
+            </a:r>
+            <a:r>
+              <a:rPr spc="-25" dirty="0"/>
+              <a:t>up:</a:t>
+            </a:r>
+          </a:p>
+          <a:p>
+            <a:pPr algn="ctr">
+              <a:lnSpc>
+                <a:spcPts val="7895"/>
+              </a:lnSpc>
+            </a:pPr>
+            <a:r>
+              <a:rPr lang="en-US" altLang="en-US" sz="6600"/>
+              <a:t>Integration &amp; Wrap-up</a:t>
+            </a:r>
+          </a:p>
+        </p:txBody>
+      </p:sp>
+      <p:sp>
+        <p:nvSpPr>
+          <p:cNvPr id="3" name="Slide Number Placeholder 2"/>
+          <p:cNvSpPr>
+            <a:spLocks noGrp="1"/>
+          </p:cNvSpPr>
+          <p:nvPr>
+            <p:ph type="sldNum" sz="quarter" idx="7"/>
+          </p:nvPr>
+        </p:nvSpPr>
+        <p:spPr/>
+        <p:txBody>
+          <a:bodyPr/>
+          <a:lstStyle/>
+          <a:p>
+            <a:fld id="{B6F15528-21DE-4FAA-801E-634DDDAF4B2B}" type="slidenum">
+              <a:rPr lang="en-IN" smtClean="0"/>
+              <a:t>12</a:t>
+            </a:fld>
+            <a:endParaRPr lang="en-IN"/>
+          </a:p>
+        </p:txBody>
+      </p:sp>
+    </p:spTree>
+  </p:cSld>
+  <p:clrMapOvr>
+    <a:masterClrMapping/>
+  </p:clrMapOvr>
+</p:sld>
+</file>
+
+<file path=ppt/slides/slide2.xml><?xml version="1.0" encoding="utf-8"?>
+<p:sld xmlns:a="http://schemas.openxmlformats.org/drawingml/2006/main" xmlns:r="http://schemas.openxmlformats.org/officeDocument/2006/relationships" xmlns:p="http://schemas.openxmlformats.org/presentationml/2006/main">
+  <p:cSld>
+    <p:spTree>
+      <p:nvGrpSpPr>
+        <p:cNvPr id="1" name=""/>
+        <p:cNvGrpSpPr/>
+        <p:nvPr/>
+      </p:nvGrpSpPr>
+      <p:grpSpPr>
+        <a:xfrm>
+          <a:off x="0" y="0"/>
+          <a:ext cx="0" cy="0"/>
+          <a:chOff x="0" y="0"/>
+          <a:chExt cx="0" cy="0"/>
+        </a:xfrm>
+      </p:grpSpPr>
+      <p:sp>
+        <p:nvSpPr>
+          <p:cNvPr id="2" name="object 2"/>
+          <p:cNvSpPr txBox="1"/>
+          <p:nvPr/>
+        </p:nvSpPr>
+        <p:spPr>
+          <a:xfrm>
+            <a:off x="101600" y="4693285"/>
+            <a:ext cx="6743065" cy="812800"/>
+          </a:xfrm>
+          <a:prstGeom prst="rect">
+            <a:avLst/>
+          </a:prstGeom>
+        </p:spPr>
+        <p:txBody>
+          <a:bodyPr vert="horz" wrap="square" lIns="0" tIns="12700" rIns="0" bIns="0" rtlCol="0">
+            <a:spAutoFit/>
+          </a:bodyPr>
+          <a:lstStyle/>
+          <a:p>
+            <a:pPr marL="12700">
+              <a:lnSpc>
+                <a:spcPct val="100000"/>
+              </a:lnSpc>
+              <a:spcBef>
+                <a:spcPts val="100"/>
+              </a:spcBef>
+            </a:pPr>
+            <a:r>
+              <a:rPr lang="en-US" altLang="en-US" sz="5200" dirty="0">
+                <a:latin typeface="Tahoma" panose="020B0604030504040204"/>
+                <a:cs typeface="Tahoma" panose="020B0604030504040204"/>
+              </a:rPr>
+              <a:t>State Normalization</a:t>
+            </a:r>
+          </a:p>
+        </p:txBody>
+      </p:sp>
+      <p:sp>
+        <p:nvSpPr>
+          <p:cNvPr id="3" name="object 3"/>
+          <p:cNvSpPr txBox="1">
+            <a:spLocks noGrp="1"/>
+          </p:cNvSpPr>
+          <p:nvPr>
+            <p:ph type="ctrTitle"/>
+          </p:nvPr>
+        </p:nvSpPr>
+        <p:spPr>
+          <a:xfrm>
+            <a:off x="7686040" y="4000500"/>
+            <a:ext cx="8465820" cy="2628265"/>
+          </a:xfrm>
+          <a:prstGeom prst="rect">
+            <a:avLst/>
+          </a:prstGeom>
+        </p:spPr>
+        <p:txBody>
+          <a:bodyPr vert="horz" wrap="square" lIns="0" tIns="12700" rIns="0" bIns="0" rtlCol="0">
+            <a:spAutoFit/>
+          </a:bodyPr>
+          <a:lstStyle/>
+          <a:p>
+            <a:pPr marL="12700">
+              <a:lnSpc>
+                <a:spcPct val="100000"/>
+              </a:lnSpc>
+              <a:spcBef>
+                <a:spcPts val="100"/>
+              </a:spcBef>
+            </a:pPr>
+            <a:r>
+              <a:rPr lang="en-US" altLang="en-US" sz="3400" spc="-290" dirty="0">
+                <a:solidFill>
+                  <a:srgbClr val="F15B2A"/>
+                </a:solidFill>
+                <a:latin typeface="Arial Black" panose="020B0A04020102020204"/>
+                <a:cs typeface="Arial Black" panose="020B0A04020102020204"/>
+              </a:rPr>
+              <a:t> The problem with nested data from APIs</a:t>
+            </a:r>
+            <a:br>
+              <a:rPr lang="en-US" altLang="en-US" sz="3400" spc="-290" dirty="0">
+                <a:solidFill>
+                  <a:srgbClr val="F15B2A"/>
+                </a:solidFill>
+                <a:latin typeface="Arial Black" panose="020B0A04020102020204"/>
+                <a:cs typeface="Arial Black" panose="020B0A04020102020204"/>
+              </a:rPr>
+            </a:br>
+            <a:br>
+              <a:rPr lang="en-US" altLang="en-US" sz="3400" spc="-290" dirty="0">
+                <a:solidFill>
+                  <a:srgbClr val="F15B2A"/>
+                </a:solidFill>
+                <a:latin typeface="Arial Black" panose="020B0A04020102020204"/>
+                <a:cs typeface="Arial Black" panose="020B0A04020102020204"/>
+              </a:rPr>
+            </a:br>
+            <a:r>
+              <a:rPr lang="en-US" altLang="en-US" sz="3400" spc="-270" dirty="0">
+                <a:solidFill>
+                  <a:srgbClr val="F15B2A"/>
+                </a:solidFill>
+                <a:latin typeface="Arial Black" panose="020B0A04020102020204"/>
+                <a:cs typeface="Arial Black" panose="020B0A04020102020204"/>
+              </a:rPr>
+              <a:t>The Solution: Normalization</a:t>
+            </a:r>
+            <a:br>
+              <a:rPr lang="en-US" altLang="en-US" sz="3400" spc="-270" dirty="0">
+                <a:solidFill>
+                  <a:srgbClr val="F15B2A"/>
+                </a:solidFill>
+                <a:latin typeface="Arial Black" panose="020B0A04020102020204"/>
+                <a:cs typeface="Arial Black" panose="020B0A04020102020204"/>
+              </a:rPr>
+            </a:br>
+            <a:br>
+              <a:rPr lang="en-US" altLang="en-US" sz="3400" spc="-270" dirty="0">
+                <a:solidFill>
+                  <a:srgbClr val="F15B2A"/>
+                </a:solidFill>
+                <a:latin typeface="Arial Black" panose="020B0A04020102020204"/>
+                <a:cs typeface="Arial Black" panose="020B0A04020102020204"/>
+              </a:rPr>
+            </a:br>
+            <a:r>
+              <a:rPr lang="en-US" altLang="en-US" sz="3400" spc="-270" dirty="0">
+                <a:solidFill>
+                  <a:srgbClr val="F15B2A"/>
+                </a:solidFill>
+                <a:latin typeface="Arial Black" panose="020B0A04020102020204"/>
+                <a:cs typeface="Arial Black" panose="020B0A04020102020204"/>
+              </a:rPr>
+              <a:t>createEntityAdapter</a:t>
+            </a:r>
+          </a:p>
+        </p:txBody>
+      </p:sp>
+      <p:sp>
+        <p:nvSpPr>
+          <p:cNvPr id="5" name="Slide Number Placeholder 4"/>
+          <p:cNvSpPr>
+            <a:spLocks noGrp="1"/>
+          </p:cNvSpPr>
+          <p:nvPr>
+            <p:ph type="sldNum" sz="quarter" idx="7"/>
+          </p:nvPr>
+        </p:nvSpPr>
+        <p:spPr/>
+        <p:txBody>
+          <a:bodyPr/>
+          <a:lstStyle/>
+          <a:p>
+            <a:fld id="{B6F15528-21DE-4FAA-801E-634DDDAF4B2B}" type="slidenum">
+              <a:rPr lang="en-IN" smtClean="0"/>
+              <a:t>2</a:t>
+            </a:fld>
+            <a:endParaRPr lang="en-IN"/>
+          </a:p>
+        </p:txBody>
+      </p:sp>
+    </p:spTree>
+  </p:cSld>
+  <p:clrMapOvr>
+    <a:masterClrMapping/>
+  </p:clrMapOvr>
+</p:sld>
+</file>
+
+<file path=ppt/slides/slide3.xml><?xml version="1.0" encoding="utf-8"?>
+<p:sld xmlns:a="http://schemas.openxmlformats.org/drawingml/2006/main" xmlns:r="http://schemas.openxmlformats.org/officeDocument/2006/relationships" xmlns:p="http://schemas.openxmlformats.org/presentationml/2006/main">
+  <p:cSld>
+    <p:spTree>
+      <p:nvGrpSpPr>
+        <p:cNvPr id="1" name=""/>
+        <p:cNvGrpSpPr/>
+        <p:nvPr/>
+      </p:nvGrpSpPr>
+      <p:grpSpPr>
+        <a:xfrm>
+          <a:off x="0" y="0"/>
+          <a:ext cx="0" cy="0"/>
+          <a:chOff x="0" y="0"/>
+          <a:chExt cx="0" cy="0"/>
+        </a:xfrm>
+      </p:grpSpPr>
+      <p:sp>
+        <p:nvSpPr>
+          <p:cNvPr id="2" name="Title 1">
+            <a:extLst>
+              <a:ext uri="{FF2B5EF4-FFF2-40B4-BE49-F238E27FC236}">
+                <a16:creationId xmlns:a16="http://schemas.microsoft.com/office/drawing/2014/main" id="{4CF61E69-346F-447A-EC6B-FCECABD492AC}"/>
+              </a:ext>
+            </a:extLst>
+          </p:cNvPr>
+          <p:cNvSpPr>
+            <a:spLocks noGrp="1"/>
+          </p:cNvSpPr>
+          <p:nvPr>
+            <p:ph type="title"/>
+          </p:nvPr>
+        </p:nvSpPr>
+        <p:spPr/>
+        <p:txBody>
+          <a:bodyPr/>
+          <a:lstStyle/>
+          <a:p>
+            <a:endParaRPr lang="en-IN"/>
+          </a:p>
+        </p:txBody>
+      </p:sp>
+      <p:sp>
+        <p:nvSpPr>
+          <p:cNvPr id="3" name="Text Placeholder 2">
+            <a:extLst>
+              <a:ext uri="{FF2B5EF4-FFF2-40B4-BE49-F238E27FC236}">
+                <a16:creationId xmlns:a16="http://schemas.microsoft.com/office/drawing/2014/main" id="{35639EAA-4C05-C1EF-7B7C-63F4F153188A}"/>
+              </a:ext>
+            </a:extLst>
+          </p:cNvPr>
+          <p:cNvSpPr>
+            <a:spLocks noGrp="1"/>
+          </p:cNvSpPr>
+          <p:nvPr>
+            <p:ph type="body" idx="1"/>
+          </p:nvPr>
+        </p:nvSpPr>
+        <p:spPr/>
+        <p:txBody>
+          <a:bodyPr/>
+          <a:lstStyle/>
+          <a:p>
+            <a:endParaRPr lang="en-IN"/>
+          </a:p>
+        </p:txBody>
+      </p:sp>
+      <p:sp>
+        <p:nvSpPr>
+          <p:cNvPr id="4" name="Slide Number Placeholder 3">
+            <a:extLst>
+              <a:ext uri="{FF2B5EF4-FFF2-40B4-BE49-F238E27FC236}">
+                <a16:creationId xmlns:a16="http://schemas.microsoft.com/office/drawing/2014/main" id="{D613C718-FBAE-DFCA-580B-5D7E33339B39}"/>
+              </a:ext>
+            </a:extLst>
+          </p:cNvPr>
+          <p:cNvSpPr>
+            <a:spLocks noGrp="1"/>
+          </p:cNvSpPr>
+          <p:nvPr>
+            <p:ph type="sldNum" sz="quarter" idx="7"/>
+          </p:nvPr>
+        </p:nvSpPr>
+        <p:spPr/>
+        <p:txBody>
+          <a:bodyPr/>
+          <a:lstStyle/>
+          <a:p>
+            <a:fld id="{B6F15528-21DE-4FAA-801E-634DDDAF4B2B}" type="slidenum">
+              <a:rPr lang="en-IN" smtClean="0"/>
+              <a:t>3</a:t>
+            </a:fld>
+            <a:endParaRPr lang="en-IN"/>
+          </a:p>
+        </p:txBody>
+      </p:sp>
+      <p:pic>
+        <p:nvPicPr>
+          <p:cNvPr id="8" name="Picture 7">
+            <a:extLst>
+              <a:ext uri="{FF2B5EF4-FFF2-40B4-BE49-F238E27FC236}">
+                <a16:creationId xmlns:a16="http://schemas.microsoft.com/office/drawing/2014/main" id="{37658693-8176-B264-B2C9-9A555CFE5FBF}"/>
+              </a:ext>
+            </a:extLst>
+          </p:cNvPr>
+          <p:cNvPicPr>
+            <a:picLocks noChangeAspect="1"/>
+          </p:cNvPicPr>
+          <p:nvPr/>
+        </p:nvPicPr>
+        <p:blipFill>
+          <a:blip r:embed="rId2"/>
+          <a:stretch>
+            <a:fillRect/>
+          </a:stretch>
+        </p:blipFill>
+        <p:spPr>
+          <a:xfrm>
+            <a:off x="1827779" y="266019"/>
+            <a:ext cx="14632442" cy="9754961"/>
+          </a:xfrm>
+          <a:prstGeom prst="rect">
+            <a:avLst/>
+          </a:prstGeom>
+        </p:spPr>
+      </p:pic>
+      <p:sp>
+        <p:nvSpPr>
+          <p:cNvPr id="10" name="TextBox 9">
+            <a:extLst>
+              <a:ext uri="{FF2B5EF4-FFF2-40B4-BE49-F238E27FC236}">
+                <a16:creationId xmlns:a16="http://schemas.microsoft.com/office/drawing/2014/main" id="{5A57DB5C-9117-4629-83BF-FF4A78884FD3}"/>
+              </a:ext>
+            </a:extLst>
+          </p:cNvPr>
+          <p:cNvSpPr txBox="1"/>
+          <p:nvPr/>
+        </p:nvSpPr>
+        <p:spPr>
+          <a:xfrm>
+            <a:off x="0" y="8381490"/>
+            <a:ext cx="17678400" cy="1077218"/>
+          </a:xfrm>
+          <a:prstGeom prst="rect">
+            <a:avLst/>
+          </a:prstGeom>
+          <a:noFill/>
+        </p:spPr>
+        <p:txBody>
+          <a:bodyPr wrap="square">
+            <a:spAutoFit/>
+          </a:bodyPr>
+          <a:lstStyle/>
+          <a:p>
+            <a:r>
+              <a:rPr lang="en-US" sz="3200" b="1" dirty="0"/>
+              <a:t>Adapter → Slice reducers (mutating-friendly with Immer) → Store, with selectors for fast reads.</a:t>
+            </a:r>
+            <a:endParaRPr lang="en-IN" sz="3200" b="1" dirty="0"/>
+          </a:p>
+        </p:txBody>
+      </p:sp>
+    </p:spTree>
+    <p:extLst>
+      <p:ext uri="{BB962C8B-B14F-4D97-AF65-F5344CB8AC3E}">
+        <p14:creationId xmlns:p14="http://schemas.microsoft.com/office/powerpoint/2010/main" val="1098230409"/>
+      </p:ext>
+    </p:extLst>
+  </p:cSld>
+  <p:clrMapOvr>
+    <a:masterClrMapping/>
+  </p:clrMapOvr>
+</p:sld>
+</file>
+
+<file path=ppt/slides/slide4.xml><?xml version="1.0" encoding="utf-8"?>
+<p:sld xmlns:a="http://schemas.openxmlformats.org/drawingml/2006/main" xmlns:r="http://schemas.openxmlformats.org/officeDocument/2006/relationships" xmlns:p="http://schemas.openxmlformats.org/presentationml/2006/main">
+  <p:cSld>
+    <p:spTree>
+      <p:nvGrpSpPr>
+        <p:cNvPr id="1" name=""/>
+        <p:cNvGrpSpPr/>
+        <p:nvPr/>
+      </p:nvGrpSpPr>
+      <p:grpSpPr>
+        <a:xfrm>
+          <a:off x="0" y="0"/>
+          <a:ext cx="0" cy="0"/>
+          <a:chOff x="0" y="0"/>
+          <a:chExt cx="0" cy="0"/>
+        </a:xfrm>
+      </p:grpSpPr>
+      <p:sp>
+        <p:nvSpPr>
+          <p:cNvPr id="2" name="Title 1">
+            <a:extLst>
+              <a:ext uri="{FF2B5EF4-FFF2-40B4-BE49-F238E27FC236}">
+                <a16:creationId xmlns:a16="http://schemas.microsoft.com/office/drawing/2014/main" id="{0D273368-2B7F-4FE1-11F2-AE3FAFA4335E}"/>
+              </a:ext>
+            </a:extLst>
+          </p:cNvPr>
+          <p:cNvSpPr>
+            <a:spLocks noGrp="1"/>
+          </p:cNvSpPr>
+          <p:nvPr>
+            <p:ph type="title"/>
+          </p:nvPr>
+        </p:nvSpPr>
+        <p:spPr/>
+        <p:txBody>
+          <a:bodyPr/>
+          <a:lstStyle/>
+          <a:p>
+            <a:endParaRPr lang="en-IN"/>
+          </a:p>
+        </p:txBody>
+      </p:sp>
+      <p:sp>
+        <p:nvSpPr>
+          <p:cNvPr id="3" name="Text Placeholder 2">
+            <a:extLst>
+              <a:ext uri="{FF2B5EF4-FFF2-40B4-BE49-F238E27FC236}">
+                <a16:creationId xmlns:a16="http://schemas.microsoft.com/office/drawing/2014/main" id="{7B4D16E8-56B0-99A9-D2E7-2B275FD3AB8A}"/>
+              </a:ext>
+            </a:extLst>
+          </p:cNvPr>
+          <p:cNvSpPr>
+            <a:spLocks noGrp="1"/>
+          </p:cNvSpPr>
+          <p:nvPr>
+            <p:ph type="body" idx="1"/>
+          </p:nvPr>
+        </p:nvSpPr>
+        <p:spPr/>
+        <p:txBody>
+          <a:bodyPr/>
+          <a:lstStyle/>
+          <a:p>
+            <a:endParaRPr lang="en-IN"/>
+          </a:p>
+        </p:txBody>
+      </p:sp>
+      <p:sp>
+        <p:nvSpPr>
+          <p:cNvPr id="4" name="Slide Number Placeholder 3">
+            <a:extLst>
+              <a:ext uri="{FF2B5EF4-FFF2-40B4-BE49-F238E27FC236}">
+                <a16:creationId xmlns:a16="http://schemas.microsoft.com/office/drawing/2014/main" id="{AE434A80-2499-4161-B996-4C3A94225FF9}"/>
+              </a:ext>
+            </a:extLst>
+          </p:cNvPr>
+          <p:cNvSpPr>
+            <a:spLocks noGrp="1"/>
+          </p:cNvSpPr>
+          <p:nvPr>
+            <p:ph type="sldNum" sz="quarter" idx="7"/>
+          </p:nvPr>
+        </p:nvSpPr>
+        <p:spPr/>
+        <p:txBody>
+          <a:bodyPr/>
+          <a:lstStyle/>
+          <a:p>
+            <a:fld id="{B6F15528-21DE-4FAA-801E-634DDDAF4B2B}" type="slidenum">
+              <a:rPr lang="en-IN" smtClean="0"/>
+              <a:t>4</a:t>
+            </a:fld>
+            <a:endParaRPr lang="en-IN"/>
+          </a:p>
+        </p:txBody>
+      </p:sp>
+      <p:sp>
+        <p:nvSpPr>
+          <p:cNvPr id="6" name="TextBox 5">
+            <a:extLst>
+              <a:ext uri="{FF2B5EF4-FFF2-40B4-BE49-F238E27FC236}">
+                <a16:creationId xmlns:a16="http://schemas.microsoft.com/office/drawing/2014/main" id="{61B64F41-B455-8D73-C87A-8A2B17589A3B}"/>
+              </a:ext>
+            </a:extLst>
+          </p:cNvPr>
+          <p:cNvSpPr txBox="1"/>
+          <p:nvPr/>
+        </p:nvSpPr>
+        <p:spPr>
+          <a:xfrm>
+            <a:off x="4571999" y="169499"/>
+            <a:ext cx="9144000" cy="892552"/>
+          </a:xfrm>
+          <a:prstGeom prst="rect">
+            <a:avLst/>
+          </a:prstGeom>
+          <a:noFill/>
+        </p:spPr>
+        <p:txBody>
+          <a:bodyPr wrap="square">
+            <a:spAutoFit/>
+          </a:bodyPr>
+          <a:lstStyle/>
+          <a:p>
+            <a:r>
+              <a:rPr lang="en-IN" sz="5200" dirty="0">
+                <a:latin typeface="Tahoma" panose="020B0604030504040204"/>
+                <a:cs typeface="Tahoma" panose="020B0604030504040204"/>
+              </a:rPr>
+              <a:t>normalized state + selectors</a:t>
+            </a:r>
+          </a:p>
+        </p:txBody>
+      </p:sp>
+      <p:pic>
+        <p:nvPicPr>
+          <p:cNvPr id="8" name="Picture 7">
+            <a:extLst>
+              <a:ext uri="{FF2B5EF4-FFF2-40B4-BE49-F238E27FC236}">
+                <a16:creationId xmlns:a16="http://schemas.microsoft.com/office/drawing/2014/main" id="{EB2350D5-336A-68FC-0530-71120719E5F0}"/>
+              </a:ext>
+            </a:extLst>
+          </p:cNvPr>
+          <p:cNvPicPr>
+            <a:picLocks noChangeAspect="1"/>
+          </p:cNvPicPr>
+          <p:nvPr/>
+        </p:nvPicPr>
+        <p:blipFill>
+          <a:blip r:embed="rId2"/>
+          <a:stretch>
+            <a:fillRect/>
+          </a:stretch>
+        </p:blipFill>
+        <p:spPr>
+          <a:xfrm>
+            <a:off x="2400299" y="990008"/>
+            <a:ext cx="13487400" cy="8991600"/>
+          </a:xfrm>
+          <a:prstGeom prst="rect">
+            <a:avLst/>
+          </a:prstGeom>
+        </p:spPr>
+      </p:pic>
+      <p:pic>
+        <p:nvPicPr>
+          <p:cNvPr id="12" name="Picture 11">
+            <a:extLst>
+              <a:ext uri="{FF2B5EF4-FFF2-40B4-BE49-F238E27FC236}">
+                <a16:creationId xmlns:a16="http://schemas.microsoft.com/office/drawing/2014/main" id="{CC35338C-E28A-D495-1338-027CDC988FD1}"/>
+              </a:ext>
+            </a:extLst>
+          </p:cNvPr>
+          <p:cNvPicPr>
+            <a:picLocks noChangeAspect="1"/>
+          </p:cNvPicPr>
+          <p:nvPr/>
+        </p:nvPicPr>
+        <p:blipFill>
+          <a:blip r:embed="rId3"/>
+          <a:stretch>
+            <a:fillRect/>
+          </a:stretch>
+        </p:blipFill>
+        <p:spPr>
+          <a:xfrm>
+            <a:off x="762000" y="7600783"/>
+            <a:ext cx="15556881" cy="2380825"/>
+          </a:xfrm>
+          <a:prstGeom prst="rect">
+            <a:avLst/>
+          </a:prstGeom>
+        </p:spPr>
+      </p:pic>
+    </p:spTree>
+    <p:extLst>
+      <p:ext uri="{BB962C8B-B14F-4D97-AF65-F5344CB8AC3E}">
+        <p14:creationId xmlns:p14="http://schemas.microsoft.com/office/powerpoint/2010/main" val="4168591860"/>
+      </p:ext>
+    </p:extLst>
+  </p:cSld>
+  <p:clrMapOvr>
+    <a:masterClrMapping/>
+  </p:clrMapOvr>
+</p:sld>
+</file>
+
+<file path=ppt/slides/slide5.xml><?xml version="1.0" encoding="utf-8"?>
+<p:sld xmlns:a="http://schemas.openxmlformats.org/drawingml/2006/main" xmlns:r="http://schemas.openxmlformats.org/officeDocument/2006/relationships" xmlns:p="http://schemas.openxmlformats.org/presentationml/2006/main">
+  <p:cSld>
+    <p:spTree>
+      <p:nvGrpSpPr>
+        <p:cNvPr id="1" name=""/>
+        <p:cNvGrpSpPr/>
+        <p:nvPr/>
+      </p:nvGrpSpPr>
+      <p:grpSpPr>
+        <a:xfrm>
+          <a:off x="0" y="0"/>
+          <a:ext cx="0" cy="0"/>
+          <a:chOff x="0" y="0"/>
+          <a:chExt cx="0" cy="0"/>
+        </a:xfrm>
+      </p:grpSpPr>
+      <p:sp>
+        <p:nvSpPr>
+          <p:cNvPr id="4" name="Slide Number Placeholder 3">
+            <a:extLst>
+              <a:ext uri="{FF2B5EF4-FFF2-40B4-BE49-F238E27FC236}">
+                <a16:creationId xmlns:a16="http://schemas.microsoft.com/office/drawing/2014/main" id="{9658359B-0EAC-138C-FD11-9634A00ED405}"/>
+              </a:ext>
+            </a:extLst>
+          </p:cNvPr>
+          <p:cNvSpPr>
+            <a:spLocks noGrp="1"/>
+          </p:cNvSpPr>
+          <p:nvPr>
+            <p:ph type="sldNum" sz="quarter" idx="7"/>
+          </p:nvPr>
+        </p:nvSpPr>
+        <p:spPr/>
+        <p:txBody>
+          <a:bodyPr/>
+          <a:lstStyle/>
+          <a:p>
+            <a:fld id="{B6F15528-21DE-4FAA-801E-634DDDAF4B2B}" type="slidenum">
+              <a:rPr lang="en-IN" smtClean="0"/>
+              <a:t>5</a:t>
+            </a:fld>
+            <a:endParaRPr lang="en-IN"/>
+          </a:p>
+        </p:txBody>
+      </p:sp>
+      <p:sp>
+        <p:nvSpPr>
+          <p:cNvPr id="5" name="AutoShape 2" descr="Image of ">
+            <a:extLst>
+              <a:ext uri="{FF2B5EF4-FFF2-40B4-BE49-F238E27FC236}">
+                <a16:creationId xmlns:a16="http://schemas.microsoft.com/office/drawing/2014/main" id="{2A703ABD-E770-D387-6A3C-2E2A61B04A4F}"/>
+              </a:ext>
+            </a:extLst>
+          </p:cNvPr>
+          <p:cNvSpPr>
+            <a:spLocks noChangeAspect="1" noChangeArrowheads="1"/>
+          </p:cNvSpPr>
+          <p:nvPr/>
+        </p:nvSpPr>
+        <p:spPr bwMode="auto">
+          <a:xfrm>
+            <a:off x="4806951" y="5206881"/>
+            <a:ext cx="8665210" cy="8665210"/>
+          </a:xfrm>
+          <a:prstGeom prst="rect">
+            <a:avLst/>
+          </a:prstGeom>
+          <a:noFill/>
+          <a:extLst>
+            <a:ext uri="{909E8E84-426E-40DD-AFC4-6F175D3DCCD1}">
+              <a14:hiddenFill xmlns:a14="http://schemas.microsoft.com/office/drawing/2010/main">
+                <a:solidFill>
+                  <a:srgbClr val="FFFFFF"/>
+                </a:solidFill>
+              </a14:hiddenFill>
+            </a:ext>
+          </a:extLst>
+        </p:spPr>
+        <p:txBody>
+          <a:bodyPr vert="horz" wrap="square" lIns="91440" tIns="45720" rIns="91440" bIns="45720" numCol="1" anchor="t" anchorCtr="0" compatLnSpc="1">
+            <a:prstTxWarp prst="textNoShape">
+              <a:avLst/>
+            </a:prstTxWarp>
+          </a:bodyPr>
+          <a:lstStyle/>
+          <a:p>
+            <a:endParaRPr lang="en-IN"/>
+          </a:p>
+        </p:txBody>
+      </p:sp>
+      <p:pic>
+        <p:nvPicPr>
+          <p:cNvPr id="11" name="Picture 10">
+            <a:extLst>
+              <a:ext uri="{FF2B5EF4-FFF2-40B4-BE49-F238E27FC236}">
+                <a16:creationId xmlns:a16="http://schemas.microsoft.com/office/drawing/2014/main" id="{A0CB264B-6226-3273-02DF-D1FDB5655F20}"/>
+              </a:ext>
+            </a:extLst>
+          </p:cNvPr>
+          <p:cNvPicPr>
+            <a:picLocks noChangeAspect="1"/>
+          </p:cNvPicPr>
+          <p:nvPr/>
+        </p:nvPicPr>
+        <p:blipFill>
+          <a:blip r:embed="rId2"/>
+          <a:stretch>
+            <a:fillRect/>
+          </a:stretch>
+        </p:blipFill>
+        <p:spPr>
+          <a:xfrm>
+            <a:off x="4288822" y="217820"/>
+            <a:ext cx="10036778" cy="9670630"/>
+          </a:xfrm>
+          <a:prstGeom prst="rect">
+            <a:avLst/>
+          </a:prstGeom>
+        </p:spPr>
+      </p:pic>
+    </p:spTree>
+    <p:extLst>
+      <p:ext uri="{BB962C8B-B14F-4D97-AF65-F5344CB8AC3E}">
+        <p14:creationId xmlns:p14="http://schemas.microsoft.com/office/powerpoint/2010/main" val="1010328000"/>
+      </p:ext>
+    </p:extLst>
+  </p:cSld>
+  <p:clrMapOvr>
+    <a:masterClrMapping/>
+  </p:clrMapOvr>
+</p:sld>
+</file>
+
+<file path=ppt/slides/slide6.xml><?xml version="1.0" encoding="utf-8"?>
+<p:sld xmlns:a="http://schemas.openxmlformats.org/drawingml/2006/main" xmlns:r="http://schemas.openxmlformats.org/officeDocument/2006/relationships" xmlns:p="http://schemas.openxmlformats.org/presentationml/2006/main">
+  <p:cSld>
+    <p:spTree>
+      <p:nvGrpSpPr>
+        <p:cNvPr id="1" name=""/>
+        <p:cNvGrpSpPr/>
+        <p:nvPr/>
+      </p:nvGrpSpPr>
+      <p:grpSpPr>
+        <a:xfrm>
+          <a:off x="0" y="0"/>
+          <a:ext cx="0" cy="0"/>
+          <a:chOff x="0" y="0"/>
+          <a:chExt cx="0" cy="0"/>
+        </a:xfrm>
+      </p:grpSpPr>
+      <p:sp>
+        <p:nvSpPr>
+          <p:cNvPr id="4" name="object 4"/>
+          <p:cNvSpPr txBox="1">
+            <a:spLocks noGrp="1"/>
+          </p:cNvSpPr>
+          <p:nvPr>
+            <p:ph type="title"/>
+          </p:nvPr>
+        </p:nvSpPr>
+        <p:spPr>
+          <a:xfrm>
+            <a:off x="3048000" y="3390900"/>
+            <a:ext cx="14474825" cy="2380615"/>
+          </a:xfrm>
+          <a:prstGeom prst="rect">
+            <a:avLst/>
+          </a:prstGeom>
+        </p:spPr>
+        <p:txBody>
+          <a:bodyPr vert="horz" wrap="square" lIns="0" tIns="349630" rIns="0" bIns="0" rtlCol="0" anchor="t" anchorCtr="0">
+            <a:spAutoFit/>
+          </a:bodyPr>
+          <a:lstStyle>
+            <a:lvl1pPr>
+              <a:defRPr sz="4800" b="0" i="0">
+                <a:solidFill>
+                  <a:schemeClr val="bg1"/>
+                </a:solidFill>
+                <a:latin typeface="Arial MT"/>
+                <a:ea typeface="+mj-ea"/>
+                <a:cs typeface="Arial MT"/>
+              </a:defRPr>
+            </a:lvl1pPr>
+          </a:lstStyle>
+          <a:p>
+            <a:pPr marL="12700" lvl="0" algn="ctr">
+              <a:spcBef>
+                <a:spcPts val="100"/>
+              </a:spcBef>
+              <a:buClrTx/>
+              <a:buSzTx/>
+              <a:buFontTx/>
+            </a:pPr>
+            <a:r>
+              <a:rPr lang="en-US" altLang="en-US" sz="4400">
+                <a:gradFill>
+                  <a:gsLst>
+                    <a:gs pos="50000">
+                      <a:schemeClr val="accent5"/>
+                    </a:gs>
+                    <a:gs pos="0">
+                      <a:schemeClr val="accent5">
+                        <a:lumMod val="25000"/>
+                        <a:lumOff val="75000"/>
+                      </a:schemeClr>
+                    </a:gs>
+                    <a:gs pos="100000">
+                      <a:schemeClr val="accent5">
+                        <a:lumMod val="85000"/>
+                      </a:schemeClr>
+                    </a:gs>
+                  </a:gsLst>
+                  <a:lin ang="5400000" scaled="1"/>
+                </a:gradFill>
+                <a:latin typeface="Arial Black" panose="020B0A04020102020204"/>
+                <a:cs typeface="Arial Black" panose="020B0A04020102020204"/>
+                <a:sym typeface="+mn-ea"/>
+              </a:rPr>
+              <a:t>Normalize an API response for a list of products and manage updates to a single product item.</a:t>
+            </a:r>
+          </a:p>
+        </p:txBody>
+      </p:sp>
+      <p:sp>
+        <p:nvSpPr>
+          <p:cNvPr id="6" name="Slide Number Placeholder 5"/>
+          <p:cNvSpPr>
+            <a:spLocks noGrp="1"/>
+          </p:cNvSpPr>
+          <p:nvPr>
+            <p:ph type="sldNum" sz="quarter" idx="7"/>
+          </p:nvPr>
+        </p:nvSpPr>
+        <p:spPr/>
+        <p:txBody>
+          <a:bodyPr/>
+          <a:lstStyle/>
+          <a:p>
+            <a:fld id="{B6F15528-21DE-4FAA-801E-634DDDAF4B2B}" type="slidenum">
+              <a:rPr lang="en-IN" smtClean="0"/>
+              <a:t>6</a:t>
+            </a:fld>
+            <a:endParaRPr lang="en-IN"/>
+          </a:p>
+        </p:txBody>
+      </p:sp>
+      <p:sp>
+        <p:nvSpPr>
+          <p:cNvPr id="7" name="object 2"/>
+          <p:cNvSpPr txBox="1">
+            <a:spLocks noGrp="1"/>
+          </p:cNvSpPr>
+          <p:nvPr/>
+        </p:nvSpPr>
+        <p:spPr>
+          <a:xfrm>
+            <a:off x="914400" y="342900"/>
+            <a:ext cx="14894560" cy="1026160"/>
+          </a:xfrm>
+          <a:prstGeom prst="rect">
+            <a:avLst/>
+          </a:prstGeom>
+        </p:spPr>
+        <p:txBody>
+          <a:bodyPr vert="horz" wrap="square" lIns="0" tIns="349630" rIns="0" bIns="0" rtlCol="0" anchor="t" anchorCtr="0">
+            <a:spAutoFit/>
+          </a:bodyPr>
+          <a:lstStyle>
+            <a:lvl1pPr>
+              <a:defRPr sz="4800" b="0" i="0">
+                <a:solidFill>
+                  <a:schemeClr val="bg1"/>
+                </a:solidFill>
+                <a:latin typeface="Arial MT"/>
+                <a:ea typeface="+mj-ea"/>
+                <a:cs typeface="Arial MT"/>
+              </a:defRPr>
+            </a:lvl1pPr>
+          </a:lstStyle>
+          <a:p>
+            <a:pPr marL="12700" algn="ctr">
+              <a:lnSpc>
+                <a:spcPct val="100000"/>
+              </a:lnSpc>
+              <a:spcBef>
+                <a:spcPts val="100"/>
+              </a:spcBef>
+              <a:buClrTx/>
+              <a:buSzTx/>
+              <a:buFontTx/>
+            </a:pPr>
+            <a:r>
+              <a:rPr lang="en-US" altLang="en-US" sz="4400">
+                <a:gradFill>
+                  <a:gsLst>
+                    <a:gs pos="50000">
+                      <a:schemeClr val="accent5"/>
+                    </a:gs>
+                    <a:gs pos="0">
+                      <a:schemeClr val="accent5">
+                        <a:lumMod val="25000"/>
+                        <a:lumOff val="75000"/>
+                      </a:schemeClr>
+                    </a:gs>
+                    <a:gs pos="100000">
+                      <a:schemeClr val="accent5">
+                        <a:lumMod val="85000"/>
+                      </a:schemeClr>
+                    </a:gs>
+                  </a:gsLst>
+                  <a:lin ang="5400000" scaled="1"/>
+                </a:gradFill>
+                <a:latin typeface="Arial Black" panose="020B0A04020102020204"/>
+                <a:cs typeface="Arial Black" panose="020B0A04020102020204"/>
+              </a:rPr>
+              <a:t>Hands-on Lab 4.1</a:t>
+            </a:r>
+          </a:p>
+        </p:txBody>
+      </p:sp>
+    </p:spTree>
+  </p:cSld>
+  <p:clrMapOvr>
+    <a:masterClrMapping/>
+  </p:clrMapOvr>
+</p:sld>
+</file>
+
+<file path=ppt/slides/slide7.xml><?xml version="1.0" encoding="utf-8"?>
+<p:sld xmlns:a="http://schemas.openxmlformats.org/drawingml/2006/main" xmlns:r="http://schemas.openxmlformats.org/officeDocument/2006/relationships" xmlns:p="http://schemas.openxmlformats.org/presentationml/2006/main">
+  <p:cSld>
+    <p:spTree>
+      <p:nvGrpSpPr>
+        <p:cNvPr id="1" name=""/>
+        <p:cNvGrpSpPr/>
+        <p:nvPr/>
+      </p:nvGrpSpPr>
+      <p:grpSpPr>
+        <a:xfrm>
+          <a:off x="0" y="0"/>
+          <a:ext cx="0" cy="0"/>
+          <a:chOff x="0" y="0"/>
+          <a:chExt cx="0" cy="0"/>
+        </a:xfrm>
+      </p:grpSpPr>
+      <p:sp>
+        <p:nvSpPr>
+          <p:cNvPr id="2" name="object 2"/>
+          <p:cNvSpPr txBox="1">
+            <a:spLocks noGrp="1"/>
+          </p:cNvSpPr>
+          <p:nvPr>
+            <p:ph type="title"/>
+          </p:nvPr>
+        </p:nvSpPr>
+        <p:spPr>
+          <a:xfrm>
+            <a:off x="3200400" y="342900"/>
+            <a:ext cx="14864080" cy="1374140"/>
+          </a:xfrm>
+          <a:prstGeom prst="rect">
+            <a:avLst/>
+          </a:prstGeom>
+        </p:spPr>
+        <p:txBody>
+          <a:bodyPr vert="horz" wrap="square" lIns="0" tIns="349630" rIns="0" bIns="0" rtlCol="0">
+            <a:spAutoFit/>
+          </a:bodyPr>
+          <a:lstStyle/>
+          <a:p>
+            <a:pPr marL="3072130" marR="5080" indent="-3015615" algn="ctr">
+              <a:lnSpc>
+                <a:spcPct val="101000"/>
+              </a:lnSpc>
+              <a:spcBef>
+                <a:spcPts val="25"/>
+              </a:spcBef>
+            </a:pPr>
+            <a:r>
+              <a:rPr lang="en-US" altLang="en-US" sz="6600"/>
+              <a:t>Code Structure &amp; Organization</a:t>
+            </a:r>
+          </a:p>
+        </p:txBody>
+      </p:sp>
+      <p:sp>
+        <p:nvSpPr>
+          <p:cNvPr id="3" name="Slide Number Placeholder 2"/>
+          <p:cNvSpPr>
+            <a:spLocks noGrp="1"/>
+          </p:cNvSpPr>
+          <p:nvPr>
+            <p:ph type="sldNum" sz="quarter" idx="7"/>
+          </p:nvPr>
+        </p:nvSpPr>
+        <p:spPr/>
+        <p:txBody>
+          <a:bodyPr/>
+          <a:lstStyle/>
+          <a:p>
+            <a:fld id="{B6F15528-21DE-4FAA-801E-634DDDAF4B2B}" type="slidenum">
+              <a:rPr lang="en-IN" smtClean="0"/>
+              <a:t>7</a:t>
+            </a:fld>
+            <a:endParaRPr lang="en-IN"/>
+          </a:p>
+        </p:txBody>
+      </p:sp>
+      <p:sp>
+        <p:nvSpPr>
+          <p:cNvPr id="4" name="Text Box 3"/>
+          <p:cNvSpPr txBox="1"/>
+          <p:nvPr/>
+        </p:nvSpPr>
+        <p:spPr>
+          <a:xfrm>
+            <a:off x="3962400" y="3086100"/>
+            <a:ext cx="13965555" cy="4297680"/>
+          </a:xfrm>
+          <a:prstGeom prst="rect">
+            <a:avLst/>
+          </a:prstGeom>
+        </p:spPr>
+        <p:txBody>
+          <a:bodyPr wrap="square">
+            <a:spAutoFit/>
+          </a:bodyPr>
+          <a:lstStyle/>
+          <a:p>
+            <a:pPr marL="1371600" indent="-457200" algn="l" defTabSz="266700">
+              <a:spcBef>
+                <a:spcPts val="500"/>
+              </a:spcBef>
+              <a:spcAft>
+                <a:spcPts val="500"/>
+              </a:spcAft>
+              <a:buFont typeface="Arial" panose="020B0604020202020204" pitchFamily="34" charset="0"/>
+              <a:buChar char="•"/>
+            </a:pPr>
+            <a:r>
+              <a:rPr lang="en-US" altLang="en-US" sz="4000">
+                <a:solidFill>
+                  <a:schemeClr val="bg2"/>
+                </a:solidFill>
+                <a:latin typeface="Times New Roman" panose="02020603050405020304"/>
+                <a:ea typeface="SimSun" panose="02010600030101010101" pitchFamily="2" charset="-122"/>
+              </a:rPr>
+              <a:t>folder by type</a:t>
+            </a:r>
+          </a:p>
+          <a:p>
+            <a:pPr marL="914400" indent="0" algn="l" defTabSz="266700">
+              <a:spcBef>
+                <a:spcPts val="500"/>
+              </a:spcBef>
+              <a:spcAft>
+                <a:spcPts val="500"/>
+              </a:spcAft>
+              <a:buFont typeface="Arial" panose="020B0604020202020204" pitchFamily="34" charset="0"/>
+              <a:buNone/>
+            </a:pPr>
+            <a:endParaRPr lang="en-US" altLang="en-US" sz="4000">
+              <a:solidFill>
+                <a:schemeClr val="bg2"/>
+              </a:solidFill>
+              <a:latin typeface="Times New Roman" panose="02020603050405020304"/>
+              <a:ea typeface="SimSun" panose="02010600030101010101" pitchFamily="2" charset="-122"/>
             </a:endParaRPr>
+          </a:p>
+          <a:p>
+            <a:pPr marL="1371600" indent="-457200" algn="l" defTabSz="266700">
+              <a:spcBef>
+                <a:spcPts val="500"/>
+              </a:spcBef>
+              <a:spcAft>
+                <a:spcPts val="500"/>
+              </a:spcAft>
+              <a:buFont typeface="Arial" panose="020B0604020202020204" pitchFamily="34" charset="0"/>
+              <a:buChar char="•"/>
+            </a:pPr>
+            <a:r>
+              <a:rPr lang="en-US" altLang="en-US" sz="4000">
+                <a:solidFill>
+                  <a:schemeClr val="bg2"/>
+                </a:solidFill>
+                <a:latin typeface="Times New Roman" panose="02020603050405020304"/>
+                <a:ea typeface="SimSun" panose="02010600030101010101" pitchFamily="2" charset="-122"/>
+              </a:rPr>
+              <a:t>feature-based (often called the Ducks Pattern)</a:t>
+            </a:r>
+          </a:p>
+          <a:p>
+            <a:pPr marL="1371600" indent="-457200" algn="l" defTabSz="266700">
+              <a:spcBef>
+                <a:spcPts val="500"/>
+              </a:spcBef>
+              <a:spcAft>
+                <a:spcPts val="500"/>
+              </a:spcAft>
+              <a:buFont typeface="Arial" panose="020B0604020202020204" pitchFamily="34" charset="0"/>
+              <a:buChar char="•"/>
+            </a:pPr>
+            <a:endParaRPr lang="en-US" altLang="en-US" sz="4000">
+              <a:solidFill>
+                <a:schemeClr val="bg2"/>
+              </a:solidFill>
+              <a:latin typeface="Times New Roman" panose="02020603050405020304"/>
+              <a:ea typeface="SimSun" panose="02010600030101010101" pitchFamily="2" charset="-122"/>
+            </a:endParaRPr>
+          </a:p>
+          <a:p>
+            <a:pPr marL="914400" indent="0" algn="l" defTabSz="266700">
+              <a:spcBef>
+                <a:spcPts val="500"/>
+              </a:spcBef>
+              <a:spcAft>
+                <a:spcPts val="500"/>
+              </a:spcAft>
+              <a:buNone/>
+            </a:pPr>
+            <a:r>
+              <a:rPr lang="en-US" altLang="en-US" sz="4000" b="1">
+                <a:solidFill>
+                  <a:schemeClr val="bg2"/>
+                </a:solidFill>
+                <a:latin typeface="Times New Roman" panose="02020603050405020304"/>
+                <a:ea typeface="SimSun" panose="02010600030101010101" pitchFamily="2" charset="-122"/>
+              </a:rPr>
+              <a:t>The recommended approach for modern, large-scale applications is the feature-based folder structure.</a:t>
+            </a:r>
+          </a:p>
+        </p:txBody>
+      </p:sp>
+    </p:spTree>
+  </p:cSld>
+  <p:clrMapOvr>
+    <a:masterClrMapping/>
+  </p:clrMapOvr>
+</p:sld>
+</file>
+
+<file path=ppt/slides/slide8.xml><?xml version="1.0" encoding="utf-8"?>
+<p:sld xmlns:a="http://schemas.openxmlformats.org/drawingml/2006/main" xmlns:r="http://schemas.openxmlformats.org/officeDocument/2006/relationships" xmlns:p="http://schemas.openxmlformats.org/presentationml/2006/main">
+  <p:cSld>
+    <p:spTree>
+      <p:nvGrpSpPr>
+        <p:cNvPr id="1" name=""/>
+        <p:cNvGrpSpPr/>
+        <p:nvPr/>
+      </p:nvGrpSpPr>
+      <p:grpSpPr>
+        <a:xfrm>
+          <a:off x="0" y="0"/>
+          <a:ext cx="0" cy="0"/>
+          <a:chOff x="0" y="0"/>
+          <a:chExt cx="0" cy="0"/>
+        </a:xfrm>
+      </p:grpSpPr>
+      <p:sp>
+        <p:nvSpPr>
+          <p:cNvPr id="2" name="object 2"/>
+          <p:cNvSpPr txBox="1">
+            <a:spLocks noGrp="1"/>
+          </p:cNvSpPr>
+          <p:nvPr>
+            <p:ph type="title"/>
+          </p:nvPr>
+        </p:nvSpPr>
+        <p:spPr>
+          <a:xfrm>
+            <a:off x="3200400" y="342900"/>
+            <a:ext cx="14864080" cy="1374140"/>
+          </a:xfrm>
+          <a:prstGeom prst="rect">
+            <a:avLst/>
+          </a:prstGeom>
+        </p:spPr>
+        <p:txBody>
+          <a:bodyPr vert="horz" wrap="square" lIns="0" tIns="349630" rIns="0" bIns="0" rtlCol="0">
+            <a:spAutoFit/>
+          </a:bodyPr>
+          <a:lstStyle/>
+          <a:p>
+            <a:pPr marL="3072130" marR="5080" indent="-3015615" algn="ctr">
+              <a:lnSpc>
+                <a:spcPct val="101000"/>
+              </a:lnSpc>
+              <a:spcBef>
+                <a:spcPts val="25"/>
+              </a:spcBef>
+            </a:pPr>
+            <a:r>
+              <a:rPr lang="en-US" altLang="en-US" sz="6600"/>
+              <a:t>Folder-by-Type</a:t>
+            </a:r>
+          </a:p>
+        </p:txBody>
+      </p:sp>
+      <p:sp>
+        <p:nvSpPr>
+          <p:cNvPr id="3" name="Slide Number Placeholder 2"/>
+          <p:cNvSpPr>
+            <a:spLocks noGrp="1"/>
+          </p:cNvSpPr>
+          <p:nvPr>
+            <p:ph type="sldNum" sz="quarter" idx="7"/>
+          </p:nvPr>
+        </p:nvSpPr>
+        <p:spPr/>
+        <p:txBody>
+          <a:bodyPr/>
+          <a:lstStyle/>
+          <a:p>
+            <a:fld id="{B6F15528-21DE-4FAA-801E-634DDDAF4B2B}" type="slidenum">
+              <a:rPr lang="en-IN" smtClean="0"/>
+              <a:t>8</a:t>
+            </a:fld>
+            <a:endParaRPr lang="en-IN"/>
+          </a:p>
+        </p:txBody>
+      </p:sp>
+      <p:sp>
+        <p:nvSpPr>
+          <p:cNvPr id="4" name="Text Box 3"/>
+          <p:cNvSpPr txBox="1"/>
+          <p:nvPr/>
+        </p:nvSpPr>
+        <p:spPr>
+          <a:xfrm>
+            <a:off x="3962400" y="3086100"/>
+            <a:ext cx="13965555" cy="6657340"/>
+          </a:xfrm>
+          <a:prstGeom prst="rect">
+            <a:avLst/>
+          </a:prstGeom>
+        </p:spPr>
+        <p:txBody>
+          <a:bodyPr wrap="square">
+            <a:spAutoFit/>
+          </a:bodyPr>
+          <a:lstStyle/>
+          <a:p>
+            <a:pPr marL="914400" indent="0" algn="l" defTabSz="266700">
+              <a:spcBef>
+                <a:spcPts val="500"/>
+              </a:spcBef>
+              <a:spcAft>
+                <a:spcPts val="500"/>
+              </a:spcAft>
+              <a:buFont typeface="Arial" panose="020B0604020202020204" pitchFamily="34" charset="0"/>
+              <a:buNone/>
+            </a:pPr>
+            <a:r>
+              <a:rPr lang="en-US" altLang="en-US" sz="4000" b="1">
+                <a:solidFill>
+                  <a:schemeClr val="bg2"/>
+                </a:solidFill>
+                <a:latin typeface="Times New Roman" panose="02020603050405020304"/>
+                <a:ea typeface="SimSun" panose="02010600030101010101" pitchFamily="2" charset="-122"/>
+              </a:rPr>
+              <a:t>Structure: All files of the same type are grouped together.</a:t>
+            </a:r>
+          </a:p>
+          <a:p>
+            <a:pPr marL="1371600" indent="-457200" algn="l" defTabSz="266700">
+              <a:spcBef>
+                <a:spcPts val="500"/>
+              </a:spcBef>
+              <a:spcAft>
+                <a:spcPts val="500"/>
+              </a:spcAft>
+              <a:buFont typeface="Arial" panose="020B0604020202020204" pitchFamily="34" charset="0"/>
+              <a:buChar char="•"/>
+            </a:pPr>
+            <a:endParaRPr lang="en-US" altLang="en-US" sz="4000" b="1">
+              <a:solidFill>
+                <a:schemeClr val="bg2"/>
+              </a:solidFill>
+              <a:latin typeface="Times New Roman" panose="02020603050405020304"/>
+              <a:ea typeface="SimSun" panose="02010600030101010101" pitchFamily="2" charset="-122"/>
+            </a:endParaRPr>
+          </a:p>
+          <a:p>
+            <a:pPr marL="1371600" indent="-457200" algn="l" defTabSz="266700">
+              <a:spcBef>
+                <a:spcPts val="500"/>
+              </a:spcBef>
+              <a:spcAft>
+                <a:spcPts val="500"/>
+              </a:spcAft>
+              <a:buFont typeface="Arial" panose="020B0604020202020204" pitchFamily="34" charset="0"/>
+              <a:buChar char="•"/>
+            </a:pPr>
+            <a:r>
+              <a:rPr lang="en-US" altLang="en-US" sz="4000" b="1">
+                <a:solidFill>
+                  <a:schemeClr val="bg2"/>
+                </a:solidFill>
+                <a:latin typeface="Times New Roman" panose="02020603050405020304"/>
+                <a:ea typeface="SimSun" panose="02010600030101010101" pitchFamily="2" charset="-122"/>
+              </a:rPr>
+              <a:t>/actions</a:t>
+            </a:r>
+          </a:p>
+          <a:p>
+            <a:pPr marL="1371600" indent="-457200" algn="l" defTabSz="266700">
+              <a:spcBef>
+                <a:spcPts val="500"/>
+              </a:spcBef>
+              <a:spcAft>
+                <a:spcPts val="500"/>
+              </a:spcAft>
+              <a:buFont typeface="Arial" panose="020B0604020202020204" pitchFamily="34" charset="0"/>
+              <a:buChar char="•"/>
+            </a:pPr>
+            <a:endParaRPr lang="en-US" altLang="en-US" sz="4000" b="1">
+              <a:solidFill>
+                <a:schemeClr val="bg2"/>
+              </a:solidFill>
+              <a:latin typeface="Times New Roman" panose="02020603050405020304"/>
+              <a:ea typeface="SimSun" panose="02010600030101010101" pitchFamily="2" charset="-122"/>
+            </a:endParaRPr>
+          </a:p>
+          <a:p>
+            <a:pPr marL="1371600" indent="-457200" algn="l" defTabSz="266700">
+              <a:spcBef>
+                <a:spcPts val="500"/>
+              </a:spcBef>
+              <a:spcAft>
+                <a:spcPts val="500"/>
+              </a:spcAft>
+              <a:buFont typeface="Arial" panose="020B0604020202020204" pitchFamily="34" charset="0"/>
+              <a:buChar char="•"/>
+            </a:pPr>
+            <a:r>
+              <a:rPr lang="en-US" altLang="en-US" sz="4000" b="1">
+                <a:solidFill>
+                  <a:schemeClr val="bg2"/>
+                </a:solidFill>
+                <a:latin typeface="Times New Roman" panose="02020603050405020304"/>
+                <a:ea typeface="SimSun" panose="02010600030101010101" pitchFamily="2" charset="-122"/>
+              </a:rPr>
+              <a:t>/reducers</a:t>
+            </a:r>
+          </a:p>
+          <a:p>
+            <a:pPr marL="1371600" indent="-457200" algn="l" defTabSz="266700">
+              <a:spcBef>
+                <a:spcPts val="500"/>
+              </a:spcBef>
+              <a:spcAft>
+                <a:spcPts val="500"/>
+              </a:spcAft>
+              <a:buFont typeface="Arial" panose="020B0604020202020204" pitchFamily="34" charset="0"/>
+              <a:buChar char="•"/>
+            </a:pPr>
+            <a:endParaRPr lang="en-US" altLang="en-US" sz="4000" b="1">
+              <a:solidFill>
+                <a:schemeClr val="bg2"/>
+              </a:solidFill>
+              <a:latin typeface="Times New Roman" panose="02020603050405020304"/>
+              <a:ea typeface="SimSun" panose="02010600030101010101" pitchFamily="2" charset="-122"/>
+            </a:endParaRPr>
+          </a:p>
+          <a:p>
+            <a:pPr marL="1371600" indent="-457200" algn="l" defTabSz="266700">
+              <a:spcBef>
+                <a:spcPts val="500"/>
+              </a:spcBef>
+              <a:spcAft>
+                <a:spcPts val="500"/>
+              </a:spcAft>
+              <a:buFont typeface="Arial" panose="020B0604020202020204" pitchFamily="34" charset="0"/>
+              <a:buChar char="•"/>
+            </a:pPr>
+            <a:r>
+              <a:rPr lang="en-US" altLang="en-US" sz="4000" b="1">
+                <a:solidFill>
+                  <a:schemeClr val="bg2"/>
+                </a:solidFill>
+                <a:latin typeface="Times New Roman" panose="02020603050405020304"/>
+                <a:ea typeface="SimSun" panose="02010600030101010101" pitchFamily="2" charset="-122"/>
+              </a:rPr>
+              <a:t>/store</a:t>
+            </a:r>
+          </a:p>
+          <a:p>
+            <a:pPr marL="1371600" indent="-457200" algn="l" defTabSz="266700">
+              <a:spcBef>
+                <a:spcPts val="500"/>
+              </a:spcBef>
+              <a:spcAft>
+                <a:spcPts val="500"/>
+              </a:spcAft>
+              <a:buFont typeface="Arial" panose="020B0604020202020204" pitchFamily="34" charset="0"/>
+              <a:buChar char="•"/>
+            </a:pPr>
+            <a:endParaRPr lang="en-US" altLang="en-US" sz="4000" b="1">
+              <a:solidFill>
+                <a:schemeClr val="bg2"/>
+              </a:solidFill>
+              <a:latin typeface="Times New Roman" panose="02020603050405020304"/>
+              <a:ea typeface="SimSun" panose="02010600030101010101" pitchFamily="2" charset="-122"/>
+            </a:endParaRPr>
+          </a:p>
+          <a:p>
+            <a:pPr marL="1371600" indent="-457200" algn="l" defTabSz="266700">
+              <a:spcBef>
+                <a:spcPts val="500"/>
+              </a:spcBef>
+              <a:spcAft>
+                <a:spcPts val="500"/>
+              </a:spcAft>
+              <a:buFont typeface="Arial" panose="020B0604020202020204" pitchFamily="34" charset="0"/>
+              <a:buChar char="•"/>
+            </a:pPr>
+            <a:r>
+              <a:rPr lang="en-US" altLang="en-US" sz="4000" b="1">
+                <a:solidFill>
+                  <a:schemeClr val="bg2"/>
+                </a:solidFill>
+                <a:latin typeface="Times New Roman" panose="02020603050405020304"/>
+                <a:ea typeface="SimSun" panose="02010600030101010101" pitchFamily="2" charset="-122"/>
+              </a:rPr>
+              <a:t>/components</a:t>
+            </a:r>
           </a:p>
         </p:txBody>
       </p:sp>
@@ -4011,74 +4153,252 @@
         </p:nvSpPr>
         <p:spPr>
           <a:xfrm>
-            <a:off x="3284220" y="3740150"/>
-            <a:ext cx="14862175" cy="2255520"/>
+            <a:off x="3200400" y="342900"/>
+            <a:ext cx="14864080" cy="2399665"/>
           </a:xfrm>
           <a:prstGeom prst="rect">
             <a:avLst/>
           </a:prstGeom>
         </p:spPr>
         <p:txBody>
-          <a:bodyPr vert="horz" wrap="square" lIns="0" tIns="508508" rIns="0" bIns="0" rtlCol="0">
+          <a:bodyPr vert="horz" wrap="square" lIns="0" tIns="349630" rIns="0" bIns="0" rtlCol="0">
             <a:spAutoFit/>
           </a:bodyPr>
           <a:lstStyle/>
           <a:p>
-            <a:pPr algn="ctr">
+            <a:pPr marL="3072130" marR="5080" indent="-3015615" algn="ctr">
               <a:lnSpc>
-                <a:spcPts val="5735"/>
+                <a:spcPct val="101000"/>
               </a:lnSpc>
               <a:spcBef>
-                <a:spcPts val="100"/>
+                <a:spcPts val="25"/>
               </a:spcBef>
             </a:pPr>
             <a:r>
-              <a:rPr dirty="0"/>
-              <a:t>Next</a:t>
+              <a:rPr lang="en-US" altLang="en-US" sz="6600"/>
+              <a:t>Feature-Based Folder Structure  (Ducks Pattern)</a:t>
             </a:r>
-            <a:r>
-              <a:rPr spc="-140" dirty="0"/>
-              <a:t> </a:t>
-            </a:r>
-            <a:r>
-              <a:rPr spc="-25" dirty="0"/>
-              <a:t>up:</a:t>
-            </a:r>
-            <a:endParaRPr spc="-25" dirty="0"/>
-          </a:p>
-          <a:p>
-            <a:pPr algn="ctr">
-              <a:lnSpc>
-                <a:spcPts val="7895"/>
-              </a:lnSpc>
+          </a:p>
+        </p:txBody>
+      </p:sp>
+      <p:sp>
+        <p:nvSpPr>
+          <p:cNvPr id="3" name="Slide Number Placeholder 2"/>
+          <p:cNvSpPr>
+            <a:spLocks noGrp="1"/>
+          </p:cNvSpPr>
+          <p:nvPr>
+            <p:ph type="sldNum" sz="quarter" idx="7"/>
+          </p:nvPr>
+        </p:nvSpPr>
+        <p:spPr/>
+        <p:txBody>
+          <a:bodyPr/>
+          <a:lstStyle/>
+          <a:p>
+            <a:fld id="{B6F15528-21DE-4FAA-801E-634DDDAF4B2B}" type="slidenum">
+              <a:rPr lang="en-IN" smtClean="0"/>
+              <a:t>9</a:t>
+            </a:fld>
+            <a:endParaRPr lang="en-IN"/>
+          </a:p>
+        </p:txBody>
+      </p:sp>
+      <p:sp>
+        <p:nvSpPr>
+          <p:cNvPr id="4" name="Text Box 3"/>
+          <p:cNvSpPr txBox="1"/>
+          <p:nvPr/>
+        </p:nvSpPr>
+        <p:spPr>
+          <a:xfrm>
+            <a:off x="3962400" y="3086100"/>
+            <a:ext cx="13965555" cy="6529070"/>
+          </a:xfrm>
+          <a:prstGeom prst="rect">
+            <a:avLst/>
+          </a:prstGeom>
+        </p:spPr>
+        <p:txBody>
+          <a:bodyPr wrap="square">
+            <a:spAutoFit/>
+          </a:bodyPr>
+          <a:lstStyle/>
+          <a:p>
+            <a:pPr marL="914400" indent="0" algn="l" defTabSz="266700">
+              <a:spcBef>
+                <a:spcPts val="500"/>
+              </a:spcBef>
+              <a:spcAft>
+                <a:spcPts val="500"/>
+              </a:spcAft>
+              <a:buFont typeface="Arial" panose="020B0604020202020204" pitchFamily="34" charset="0"/>
+              <a:buNone/>
             </a:pPr>
             <a:r>
-              <a:rPr lang="en-US" altLang="en-US" sz="6600"/>
-              <a:t>Integration &amp; Wrap-up</a:t>
+              <a:rPr lang="en-US" altLang="en-US" sz="4000" b="1">
+                <a:solidFill>
+                  <a:schemeClr val="bg2"/>
+                </a:solidFill>
+                <a:latin typeface="Times New Roman" panose="02020603050405020304"/>
+                <a:ea typeface="SimSun" panose="02010600030101010101" pitchFamily="2" charset="-122"/>
+              </a:rPr>
+              <a:t>Structure: All files related to a specific feature are grouped together in their own directory.</a:t>
             </a:r>
-            <a:endParaRPr lang="en-US" altLang="en-US" sz="6600"/>
-          </a:p>
-        </p:txBody>
-      </p:sp>
-      <p:sp>
-        <p:nvSpPr>
-          <p:cNvPr id="3" name="Slide Number Placeholder 2"/>
-          <p:cNvSpPr>
-            <a:spLocks noGrp="1"/>
-          </p:cNvSpPr>
-          <p:nvPr>
-            <p:ph type="sldNum" sz="quarter" idx="7"/>
-          </p:nvPr>
-        </p:nvSpPr>
-        <p:spPr/>
-        <p:txBody>
-          <a:bodyPr/>
-          <a:lstStyle/>
-          <a:p>
-            <a:fld id="{B6F15528-21DE-4FAA-801E-634DDDAF4B2B}" type="slidenum">
-              <a:rPr lang="en-IN" smtClean="0"/>
-            </a:fld>
-            <a:endParaRPr lang="en-IN"/>
+          </a:p>
+          <a:p>
+            <a:pPr marL="1485900" indent="-571500" algn="l" defTabSz="266700">
+              <a:spcBef>
+                <a:spcPts val="500"/>
+              </a:spcBef>
+              <a:spcAft>
+                <a:spcPts val="500"/>
+              </a:spcAft>
+              <a:buFont typeface="Arial" panose="020B0604020202020204" pitchFamily="34" charset="0"/>
+              <a:buChar char="•"/>
+            </a:pPr>
+            <a:r>
+              <a:rPr lang="en-US" altLang="en-US" sz="4000" b="1">
+                <a:solidFill>
+                  <a:schemeClr val="bg2"/>
+                </a:solidFill>
+                <a:latin typeface="Times New Roman" panose="02020603050405020304"/>
+                <a:ea typeface="SimSun" panose="02010600030101010101" pitchFamily="2" charset="-122"/>
+              </a:rPr>
+              <a:t>/features</a:t>
+            </a:r>
+          </a:p>
+          <a:p>
+            <a:pPr marL="1943100" lvl="1" indent="-571500" algn="l" defTabSz="266700">
+              <a:spcBef>
+                <a:spcPts val="500"/>
+              </a:spcBef>
+              <a:spcAft>
+                <a:spcPts val="500"/>
+              </a:spcAft>
+              <a:buFont typeface="Arial" panose="020B0604020202020204" pitchFamily="34" charset="0"/>
+              <a:buChar char="•"/>
+            </a:pPr>
+            <a:r>
+              <a:rPr lang="en-US" altLang="en-US" sz="4000" b="1">
+                <a:solidFill>
+                  <a:schemeClr val="bg2"/>
+                </a:solidFill>
+                <a:latin typeface="Times New Roman" panose="02020603050405020304"/>
+                <a:ea typeface="SimSun" panose="02010600030101010101" pitchFamily="2" charset="-122"/>
+              </a:rPr>
+              <a:t>/user</a:t>
+            </a:r>
+          </a:p>
+          <a:p>
+            <a:pPr marL="2400300" lvl="2" indent="-571500" algn="l" defTabSz="266700">
+              <a:spcBef>
+                <a:spcPts val="500"/>
+              </a:spcBef>
+              <a:spcAft>
+                <a:spcPts val="500"/>
+              </a:spcAft>
+              <a:buFont typeface="Arial" panose="020B0604020202020204" pitchFamily="34" charset="0"/>
+              <a:buChar char="•"/>
+            </a:pPr>
+            <a:r>
+              <a:rPr lang="en-US" altLang="en-US" sz="4000" b="1">
+                <a:solidFill>
+                  <a:schemeClr val="bg2"/>
+                </a:solidFill>
+                <a:latin typeface="Times New Roman" panose="02020603050405020304"/>
+                <a:ea typeface="SimSun" panose="02010600030101010101" pitchFamily="2" charset="-122"/>
+              </a:rPr>
+              <a:t>userSlice.ts</a:t>
+            </a:r>
+          </a:p>
+          <a:p>
+            <a:pPr marL="2400300" lvl="2" indent="-571500" algn="l" defTabSz="266700">
+              <a:spcBef>
+                <a:spcPts val="500"/>
+              </a:spcBef>
+              <a:spcAft>
+                <a:spcPts val="500"/>
+              </a:spcAft>
+              <a:buFont typeface="Arial" panose="020B0604020202020204" pitchFamily="34" charset="0"/>
+              <a:buChar char="•"/>
+            </a:pPr>
+            <a:r>
+              <a:rPr lang="en-US" altLang="en-US" sz="4000" b="1">
+                <a:solidFill>
+                  <a:schemeClr val="bg2"/>
+                </a:solidFill>
+                <a:latin typeface="Times New Roman" panose="02020603050405020304"/>
+                <a:ea typeface="SimSun" panose="02010600030101010101" pitchFamily="2" charset="-122"/>
+              </a:rPr>
+              <a:t>UserProfile.tsx</a:t>
+            </a:r>
+          </a:p>
+          <a:p>
+            <a:pPr marL="1943100" lvl="1" indent="-571500" algn="l" defTabSz="266700">
+              <a:spcBef>
+                <a:spcPts val="500"/>
+              </a:spcBef>
+              <a:spcAft>
+                <a:spcPts val="500"/>
+              </a:spcAft>
+              <a:buFont typeface="Arial" panose="020B0604020202020204" pitchFamily="34" charset="0"/>
+              <a:buChar char="•"/>
+            </a:pPr>
+            <a:r>
+              <a:rPr lang="en-US" altLang="en-US" sz="4000" b="1">
+                <a:solidFill>
+                  <a:schemeClr val="bg2"/>
+                </a:solidFill>
+                <a:latin typeface="Times New Roman" panose="02020603050405020304"/>
+                <a:ea typeface="SimSun" panose="02010600030101010101" pitchFamily="2" charset="-122"/>
+              </a:rPr>
+              <a:t>/products</a:t>
+            </a:r>
+          </a:p>
+          <a:p>
+            <a:pPr marL="2400300" lvl="2" indent="-571500" algn="l" defTabSz="266700">
+              <a:spcBef>
+                <a:spcPts val="500"/>
+              </a:spcBef>
+              <a:spcAft>
+                <a:spcPts val="500"/>
+              </a:spcAft>
+              <a:buFont typeface="Arial" panose="020B0604020202020204" pitchFamily="34" charset="0"/>
+              <a:buChar char="•"/>
+            </a:pPr>
+            <a:r>
+              <a:rPr lang="en-US" altLang="en-US" sz="4000" b="1">
+                <a:solidFill>
+                  <a:schemeClr val="bg2"/>
+                </a:solidFill>
+                <a:latin typeface="Times New Roman" panose="02020603050405020304"/>
+                <a:ea typeface="SimSun" panose="02010600030101010101" pitchFamily="2" charset="-122"/>
+              </a:rPr>
+              <a:t>productsSlice.ts</a:t>
+            </a:r>
+          </a:p>
+          <a:p>
+            <a:pPr marL="2400300" lvl="2" indent="-571500" algn="l" defTabSz="266700">
+              <a:spcBef>
+                <a:spcPts val="500"/>
+              </a:spcBef>
+              <a:spcAft>
+                <a:spcPts val="500"/>
+              </a:spcAft>
+              <a:buFont typeface="Arial" panose="020B0604020202020204" pitchFamily="34" charset="0"/>
+              <a:buChar char="•"/>
+            </a:pPr>
+            <a:r>
+              <a:rPr lang="en-US" altLang="en-US" sz="4000" b="1">
+                <a:solidFill>
+                  <a:schemeClr val="bg2"/>
+                </a:solidFill>
+                <a:latin typeface="Times New Roman" panose="02020603050405020304"/>
+                <a:ea typeface="SimSun" panose="02010600030101010101" pitchFamily="2" charset="-122"/>
+              </a:rPr>
+              <a:t>ProductList.tsx</a:t>
+            </a:r>
           </a:p>
         </p:txBody>
       </p:sp>
@@ -4368,6 +4688,8 @@
       </a:bgFillStyleLst>
     </a:fmtScheme>
   </a:themeElements>
+  <a:objectDefaults/>
+  <a:extraClrSchemeLst/>
   <a:extLst>
     <a:ext uri="{05A4C25C-085E-4340-85A3-A5531E510DB2}">
       <thm15:themeFamily xmlns:thm15="http://schemas.microsoft.com/office/thememl/2012/main" name="Office Theme" id="{62F939B6-93AF-4DB8-9C6B-D6C7DFDC589F}" vid="{4A3C46E8-61CC-4603-A589-7422A47A8E4A}"/>
@@ -4648,6 +4970,7 @@
       </a:style>
     </a:lnDef>
   </a:objectDefaults>
+  <a:extraClrSchemeLst/>
   <a:extLst>
     <a:ext uri="{05A4C25C-085E-4340-85A3-A5531E510DB2}">
       <thm15:themeFamily xmlns:thm15="http://schemas.microsoft.com/office/thememl/2012/main" name="Office Theme" id="{62F939B6-93AF-4DB8-9C6B-D6C7DFDC589F}" vid="{4A3C46E8-61CC-4603-A589-7422A47A8E4A}"/>
